--- a/docs/LHAMS_크리니티_통합세미나.pptx
+++ b/docs/LHAMS_크리니티_통합세미나.pptx
@@ -22,6 +22,10 @@
     <p:sldId id="270" r:id="rId21"/>
     <p:sldId id="271" r:id="rId22"/>
     <p:sldId id="272" r:id="rId23"/>
+    <p:sldId id="276" r:id="rId27"/>
+    <p:sldId id="277" r:id="rId28"/>
+    <p:sldId id="278" r:id="rId29"/>
+    <p:sldId id="279" r:id="rId30"/>
     <p:sldId id="273" r:id="rId24"/>
     <p:sldId id="274" r:id="rId25"/>
     <p:sldId id="275" r:id="rId26"/>
@@ -3631,13 +3635,13 @@
               </a:lnSpc>
             </a:pPr>
             <a:r>
-              <a:rPr sz="1000" b="0" i="0">
+              <a:rPr sz="1000" b="0">
                 <a:solidFill>
                   <a:srgbClr val="6E7E8E"/>
                 </a:solidFill>
                 <a:latin typeface="Consolas"/>
               </a:rPr>
-              <a:t>10 / 20</a:t>
+              <a:t>10 / 24</a:t>
             </a:r>
           </a:p>
         </p:txBody>
@@ -4373,13 +4377,13 @@
               </a:lnSpc>
             </a:pPr>
             <a:r>
-              <a:rPr sz="1000" b="0" i="0">
+              <a:rPr sz="1000" b="0">
                 <a:solidFill>
                   <a:srgbClr val="6E7E8E"/>
                 </a:solidFill>
                 <a:latin typeface="Consolas"/>
               </a:rPr>
-              <a:t>11 / 20</a:t>
+              <a:t>11 / 24</a:t>
             </a:r>
           </a:p>
         </p:txBody>
@@ -5201,13 +5205,13 @@
               </a:lnSpc>
             </a:pPr>
             <a:r>
-              <a:rPr sz="1000" b="0" i="0">
+              <a:rPr sz="1000" b="0">
                 <a:solidFill>
                   <a:srgbClr val="6E7E8E"/>
                 </a:solidFill>
                 <a:latin typeface="Consolas"/>
               </a:rPr>
-              <a:t>12 / 20</a:t>
+              <a:t>12 / 24</a:t>
             </a:r>
           </a:p>
         </p:txBody>
@@ -6216,13 +6220,13 @@
               </a:lnSpc>
             </a:pPr>
             <a:r>
-              <a:rPr sz="1000" b="0" i="0">
+              <a:rPr sz="1000" b="0">
                 <a:solidFill>
                   <a:srgbClr val="6E7E8E"/>
                 </a:solidFill>
                 <a:latin typeface="Consolas"/>
               </a:rPr>
-              <a:t>13 / 20</a:t>
+              <a:t>13 / 24</a:t>
             </a:r>
           </a:p>
         </p:txBody>
@@ -6999,13 +7003,13 @@
               </a:lnSpc>
             </a:pPr>
             <a:r>
-              <a:rPr sz="1000" b="0" i="0">
+              <a:rPr sz="1000" b="0">
                 <a:solidFill>
                   <a:srgbClr val="6E7E8E"/>
                 </a:solidFill>
                 <a:latin typeface="Consolas"/>
               </a:rPr>
-              <a:t>14 / 20</a:t>
+              <a:t>14 / 24</a:t>
             </a:r>
           </a:p>
         </p:txBody>
@@ -7160,13 +7164,13 @@
               </a:lnSpc>
             </a:pPr>
             <a:r>
-              <a:rPr sz="1250" b="0" i="0">
+              <a:rPr sz="1250" b="0">
                 <a:solidFill>
                   <a:srgbClr val="6E7E8E"/>
                 </a:solidFill>
                 <a:latin typeface="맑은 고딕"/>
               </a:rPr>
-              <a:t>React + Tailwind/SCSS, 3초 폴링 · “심야 관제실” 다크 테마 — 아래는 오늘 로컬 환경에서 직접 구동해 캡처한 실제 화면입니다.</a:t>
+              <a:t>React + Vite + SCSS, 3초 폴링 · "심야 관제실" 다크 테마 — 대시보드는 요약·대시보드·관리자 3-tab 중 하나이며, 아래는 대시보드 탭 실제 화면입니다.</a:t>
             </a:r>
           </a:p>
         </p:txBody>
@@ -7187,8 +7191,8 @@
         </p:blipFill>
         <p:spPr>
           <a:xfrm>
-            <a:off x="1298448" y="2148840"/>
-            <a:ext cx="9601200" cy="6750844"/>
+            <a:off x="3172968" y="2103120"/>
+            <a:ext cx="5852160" cy="4114800"/>
           </a:xfrm>
           <a:prstGeom prst="rect">
             <a:avLst/>
@@ -7203,8 +7207,8 @@
         </p:nvSpPr>
         <p:spPr>
           <a:xfrm>
-            <a:off x="1298448" y="2148840"/>
-            <a:ext cx="9601200" cy="6750843"/>
+            <a:off x="3172968" y="2103120"/>
+            <a:ext cx="5852160" cy="4114800"/>
           </a:xfrm>
           <a:prstGeom prst="rect">
             <a:avLst/>
@@ -7489,13 +7493,13 @@
               </a:lnSpc>
             </a:pPr>
             <a:r>
-              <a:rPr sz="1000" b="0" i="0">
+              <a:rPr sz="1000" b="0">
                 <a:solidFill>
                   <a:srgbClr val="6E7E8E"/>
                 </a:solidFill>
                 <a:latin typeface="Consolas"/>
               </a:rPr>
-              <a:t>15 / 20</a:t>
+              <a:t>15 / 24</a:t>
             </a:r>
           </a:p>
         </p:txBody>
@@ -7930,14 +7934,6 @@
             </a:r>
           </a:p>
           <a:p>
-            <a:pPr>
-              <a:lnSpc>
-                <a:spcPct val="135000"/>
-              </a:lnSpc>
-              <a:spcAft>
-                <a:spcPts val="1000"/>
-              </a:spcAft>
-            </a:pPr>
             <a:r>
               <a:rPr sz="1350">
                 <a:solidFill>
@@ -7949,14 +7945,6 @@
             </a:r>
           </a:p>
           <a:p>
-            <a:pPr>
-              <a:lnSpc>
-                <a:spcPct val="135000"/>
-              </a:lnSpc>
-              <a:spcAft>
-                <a:spcPts val="1000"/>
-              </a:spcAft>
-            </a:pPr>
             <a:r>
               <a:rPr sz="1350">
                 <a:solidFill>
@@ -7968,14 +7956,6 @@
             </a:r>
           </a:p>
           <a:p>
-            <a:pPr>
-              <a:lnSpc>
-                <a:spcPct val="135000"/>
-              </a:lnSpc>
-              <a:spcAft>
-                <a:spcPts val="1000"/>
-              </a:spcAft>
-            </a:pPr>
             <a:r>
               <a:rPr sz="1350">
                 <a:solidFill>
@@ -7983,7 +7963,7 @@
                 </a:solidFill>
                 <a:latin typeface="맑은 고딕"/>
               </a:rPr>
-              <a:t>—  최신 200건만 유지 (MAX_JSON_EVENTS)</a:t>
+              <a:t>—  최신 200건만 유지(MAX_JSON_EVENTS) — admin_audit.json(관리자 조작 감사)·checklist.json(구축 체크리스트)도 별도 관리</a:t>
             </a:r>
           </a:p>
         </p:txBody>
@@ -8238,13 +8218,13 @@
               </a:lnSpc>
             </a:pPr>
             <a:r>
-              <a:rPr sz="1000" b="0" i="0">
+              <a:rPr sz="1000" b="0">
                 <a:solidFill>
                   <a:srgbClr val="6E7E8E"/>
                 </a:solidFill>
                 <a:latin typeface="Consolas"/>
               </a:rPr>
-              <a:t>16 / 20</a:t>
+              <a:t>16 / 24</a:t>
             </a:r>
           </a:p>
         </p:txBody>
@@ -9094,13 +9074,13 @@
               </a:lnSpc>
             </a:pPr>
             <a:r>
-              <a:rPr sz="1000" b="0" i="0">
+              <a:rPr sz="1000" b="0">
                 <a:solidFill>
                   <a:srgbClr val="6E7E8E"/>
                 </a:solidFill>
                 <a:latin typeface="Consolas"/>
               </a:rPr>
-              <a:t>17 / 20</a:t>
+              <a:t>17 / 24</a:t>
             </a:r>
           </a:p>
         </p:txBody>
@@ -9361,11 +9341,6 @@
             </a:r>
           </a:p>
           <a:p>
-            <a:pPr algn="l">
-              <a:lnSpc>
-                <a:spcPct val="130000"/>
-              </a:lnSpc>
-            </a:pPr>
             <a:r>
               <a:rPr sz="1300" b="1">
                 <a:solidFill>
@@ -9382,15 +9357,10 @@
                 </a:solidFill>
                 <a:latin typeface="Consolas"/>
               </a:rPr>
-              <a:t>    # React 관제 대시보드</a:t>
-            </a:r>
-          </a:p>
-          <a:p>
-            <a:pPr algn="l">
-              <a:lnSpc>
-                <a:spcPct val="130000"/>
-              </a:lnSpc>
-            </a:pPr>
+              <a:t>    # React 관제 대시보드 (요약·대시보드·관리자 3-tab)</a:t>
+            </a:r>
+          </a:p>
+          <a:p>
             <a:r>
               <a:rPr sz="1300" b="1">
                 <a:solidFill>
@@ -9407,15 +9377,10 @@
                 </a:solidFill>
                 <a:latin typeface="Consolas"/>
               </a:rPr>
-              <a:t>       # Python Watchdog 컨트롤 타워</a:t>
-            </a:r>
-          </a:p>
-          <a:p>
-            <a:pPr algn="l">
-              <a:lnSpc>
-                <a:spcPct val="130000"/>
-              </a:lnSpc>
-            </a:pPr>
+              <a:t>       # Python Watchdog 컨트롤 타워 + 관리 API(Flask)</a:t>
+            </a:r>
+          </a:p>
+          <a:p>
             <a:r>
               <a:rPr sz="1300" b="1">
                 <a:solidFill>
@@ -9436,11 +9401,6 @@
             </a:r>
           </a:p>
           <a:p>
-            <a:pPr algn="l">
-              <a:lnSpc>
-                <a:spcPct val="130000"/>
-              </a:lnSpc>
-            </a:pPr>
             <a:r>
               <a:rPr sz="1300" b="1">
                 <a:solidFill>
@@ -9461,11 +9421,6 @@
             </a:r>
           </a:p>
           <a:p>
-            <a:pPr algn="l">
-              <a:lnSpc>
-                <a:spcPct val="130000"/>
-              </a:lnSpc>
-            </a:pPr>
             <a:r>
               <a:rPr sz="1300" b="1">
                 <a:solidFill>
@@ -9486,11 +9441,6 @@
             </a:r>
           </a:p>
           <a:p>
-            <a:pPr algn="l">
-              <a:lnSpc>
-                <a:spcPct val="130000"/>
-              </a:lnSpc>
-            </a:pPr>
             <a:r>
               <a:rPr sz="1300" b="1">
                 <a:solidFill>
@@ -9507,7 +9457,7 @@
                 </a:solidFill>
                 <a:latin typeface="Consolas"/>
               </a:rPr>
-              <a:t>        # target_monitor · quarantine · logs (Git 제외)</a:t>
+              <a:t>        # test_monitor · quarantine · logs · config_backups (Git 제외)</a:t>
             </a:r>
           </a:p>
         </p:txBody>
@@ -9688,13 +9638,13 @@
               </a:lnSpc>
             </a:pPr>
             <a:r>
-              <a:rPr sz="1000" b="0" i="0">
+              <a:rPr sz="1000" b="0">
                 <a:solidFill>
                   <a:srgbClr val="6E7E8E"/>
                 </a:solidFill>
                 <a:latin typeface="Consolas"/>
               </a:rPr>
-              <a:t>11 — 라이브 데모</a:t>
+              <a:t>15 — 라이브 데모</a:t>
             </a:r>
           </a:p>
         </p:txBody>
@@ -9762,13 +9712,13 @@
               </a:lnSpc>
             </a:pPr>
             <a:r>
-              <a:rPr sz="1000" b="0" i="0">
+              <a:rPr sz="1000" b="0">
                 <a:solidFill>
                   <a:srgbClr val="6E7E8E"/>
                 </a:solidFill>
                 <a:latin typeface="Consolas"/>
               </a:rPr>
-              <a:t>18 / 20</a:t>
+              <a:t>22 / 24</a:t>
             </a:r>
           </a:p>
         </p:txBody>
@@ -9845,13 +9795,13 @@
               </a:lnSpc>
             </a:pPr>
             <a:r>
-              <a:rPr sz="1150" b="1" i="0">
+              <a:rPr sz="1150" b="1">
                 <a:solidFill>
                   <a:srgbClr val="7FB3D5"/>
                 </a:solidFill>
                 <a:latin typeface="Consolas"/>
               </a:rPr>
-              <a:t>11 · LIVE DEMO</a:t>
+              <a:t>15 · LIVE DEMO</a:t>
             </a:r>
           </a:p>
         </p:txBody>
@@ -10283,13 +10233,13 @@
               </a:lnSpc>
             </a:pPr>
             <a:r>
-              <a:rPr sz="1200" b="0" i="0">
+              <a:rPr sz="1200" b="0">
                 <a:solidFill>
                   <a:srgbClr val="6E7E8E"/>
                 </a:solidFill>
                 <a:latin typeface="Consolas"/>
               </a:rPr>
-              <a:t>touch → echo(수정) → rm(삭제) → EICAR wget(악성코드)</a:t>
+              <a:t>touch → echo(수정) → mv(교체) → rm(삭제) → EICAR 로컬 생성(악성코드)</a:t>
             </a:r>
           </a:p>
         </p:txBody>
@@ -10470,13 +10420,13 @@
               </a:lnSpc>
             </a:pPr>
             <a:r>
-              <a:rPr sz="1000" b="0" i="0">
+              <a:rPr sz="1000" b="0">
                 <a:solidFill>
                   <a:srgbClr val="6E7E8E"/>
                 </a:solidFill>
                 <a:latin typeface="Consolas"/>
               </a:rPr>
-              <a:t>12 — 결론</a:t>
+              <a:t>16 — 결론</a:t>
             </a:r>
           </a:p>
         </p:txBody>
@@ -10544,13 +10494,13 @@
               </a:lnSpc>
             </a:pPr>
             <a:r>
-              <a:rPr sz="1000" b="0" i="0">
+              <a:rPr sz="1000" b="0">
                 <a:solidFill>
                   <a:srgbClr val="6E7E8E"/>
                 </a:solidFill>
                 <a:latin typeface="Consolas"/>
               </a:rPr>
-              <a:t>19 / 20</a:t>
+              <a:t>23 / 24</a:t>
             </a:r>
           </a:p>
         </p:txBody>
@@ -10627,13 +10577,13 @@
               </a:lnSpc>
             </a:pPr>
             <a:r>
-              <a:rPr sz="1150" b="1" i="0">
+              <a:rPr sz="1150" b="1">
                 <a:solidFill>
                   <a:srgbClr val="7FB3D5"/>
                 </a:solidFill>
                 <a:latin typeface="Consolas"/>
               </a:rPr>
-              <a:t>12 · CONCLUSION</a:t>
+              <a:t>16 · CONCLUSION</a:t>
             </a:r>
           </a:p>
         </p:txBody>
@@ -10858,18 +10808,10 @@
                 </a:solidFill>
                 <a:latin typeface="맑은 고딕"/>
               </a:rPr>
-              <a:t>—  보안 위협에 대한 빠른 초기 대응</a:t>
-            </a:r>
-          </a:p>
-          <a:p>
-            <a:pPr>
-              <a:lnSpc>
-                <a:spcPct val="135000"/>
-              </a:lnSpc>
-              <a:spcAft>
-                <a:spcPts val="1000"/>
-              </a:spcAft>
-            </a:pPr>
+              <a:t>—  보안 위협에 대한 빠른 초기 대응 + 관리자 조작까지 포함한 이중 감사 체계</a:t>
+            </a:r>
+          </a:p>
+          <a:p>
             <a:r>
               <a:rPr sz="1250">
                 <a:solidFill>
@@ -10877,18 +10819,10 @@
                 </a:solidFill>
                 <a:latin typeface="맑은 고딕"/>
               </a:rPr>
-              <a:t>—  서버 관리 리소스 절감</a:t>
-            </a:r>
-          </a:p>
-          <a:p>
-            <a:pPr>
-              <a:lnSpc>
-                <a:spcPct val="135000"/>
-              </a:lnSpc>
-              <a:spcAft>
-                <a:spcPts val="1000"/>
-              </a:spcAft>
-            </a:pPr>
+              <a:t>—  서버 관리 리소스 절감 — 설정 백업/내보내기·가져오기로 다중 서버 표준화</a:t>
+            </a:r>
+          </a:p>
+          <a:p>
             <a:r>
               <a:rPr sz="1250">
                 <a:solidFill>
@@ -10896,7 +10830,7 @@
                 </a:solidFill>
                 <a:latin typeface="맑은 고딕"/>
               </a:rPr>
-              <a:t>—  시스템 안정성 확보</a:t>
+              <a:t>—  시스템 안정성 확보 + 헬스체크(/api/health)로 장애 조기 발견</a:t>
             </a:r>
           </a:p>
         </p:txBody>
@@ -11082,18 +11016,10 @@
                 </a:solidFill>
                 <a:latin typeface="맑은 고딕"/>
               </a:rPr>
-              <a:t>—  취약점 진단 및 리포팅 체계화</a:t>
-            </a:r>
-          </a:p>
-          <a:p>
-            <a:pPr>
-              <a:lnSpc>
-                <a:spcPct val="135000"/>
-              </a:lnSpc>
-              <a:spcAft>
-                <a:spcPts val="1000"/>
-              </a:spcAft>
-            </a:pPr>
+              <a:t>—  계정 기반 로그인/SSO 연동으로 관리자 인증 고도화</a:t>
+            </a:r>
+          </a:p>
+          <a:p>
             <a:r>
               <a:rPr sz="1250">
                 <a:solidFill>
@@ -11101,18 +11027,10 @@
                 </a:solidFill>
                 <a:latin typeface="맑은 고딕"/>
               </a:rPr>
-              <a:t>—  비정상 접근 로그 분석 연동</a:t>
-            </a:r>
-          </a:p>
-          <a:p>
-            <a:pPr>
-              <a:lnSpc>
-                <a:spcPct val="135000"/>
-              </a:lnSpc>
-              <a:spcAft>
-                <a:spcPts val="1000"/>
-              </a:spcAft>
-            </a:pPr>
+              <a:t>—  이상 징후 발생 시 Slack/이메일 자동 알림 연동</a:t>
+            </a:r>
+          </a:p>
+          <a:p>
             <a:r>
               <a:rPr sz="1250">
                 <a:solidFill>
@@ -11120,7 +11038,7 @@
                 </a:solidFill>
                 <a:latin typeface="맑은 고딕"/>
               </a:rPr>
-              <a:t>—  통합 자체 보안 시스템으로 고도화</a:t>
+              <a:t>—  다중 사이트 통합 모니터링 대시보드(전사 현황판)로 확장</a:t>
             </a:r>
           </a:p>
         </p:txBody>
@@ -11499,13 +11417,13 @@
               </a:lnSpc>
             </a:pPr>
             <a:r>
-              <a:rPr sz="1000" b="0" i="0">
+              <a:rPr sz="1000" b="0">
                 <a:solidFill>
                   <a:srgbClr val="6E7E8E"/>
                 </a:solidFill>
                 <a:latin typeface="Consolas"/>
               </a:rPr>
-              <a:t>02 / 20</a:t>
+              <a:t>02 / 24</a:t>
             </a:r>
           </a:p>
         </p:txBody>
@@ -12302,13 +12220,13 @@
               </a:lnSpc>
             </a:pPr>
             <a:r>
-              <a:rPr sz="1000" b="0" i="0">
+              <a:rPr sz="1000" b="0">
                 <a:solidFill>
                   <a:srgbClr val="6E7E8E"/>
                 </a:solidFill>
                 <a:latin typeface="Consolas"/>
               </a:rPr>
-              <a:t>20 / 20</a:t>
+              <a:t>24 / 24</a:t>
             </a:r>
           </a:p>
         </p:txBody>
@@ -12442,6 +12360,3510 @@
                 <a:latin typeface="맑은 고딕"/>
               </a:rPr>
               <a:t>단순 파일 감지를 넘어, 커널 레벨 실행 추적부터 대시보드 시각화까지.</a:t>
+            </a:r>
+          </a:p>
+        </p:txBody>
+      </p:sp>
+    </p:spTree>
+  </p:cSld>
+  <p:clrMapOvr>
+    <a:masterClrMapping/>
+  </p:clrMapOvr>
+</p:sld>
+</file>
+
+<file path=ppt/slides/slide21.xml><?xml version="1.0" encoding="utf-8"?>
+<p:sld xmlns:a="http://schemas.openxmlformats.org/drawingml/2006/main" xmlns:p="http://schemas.openxmlformats.org/presentationml/2006/main" xmlns:r="http://schemas.openxmlformats.org/officeDocument/2006/relationships">
+  <p:cSld>
+    <p:bg>
+      <p:bgPr>
+        <a:solidFill>
+          <a:srgbClr val="0E141B"/>
+        </a:solidFill>
+        <a:effectLst/>
+      </p:bgPr>
+    </p:bg>
+    <p:spTree>
+      <p:nvGrpSpPr>
+        <p:cNvPr id="1" name=""/>
+        <p:cNvGrpSpPr/>
+        <p:nvPr/>
+      </p:nvGrpSpPr>
+      <p:grpSpPr/>
+      <p:sp>
+        <p:nvSpPr>
+          <p:cNvPr id="2" name="Oval 1"/>
+          <p:cNvSpPr/>
+          <p:nvPr/>
+        </p:nvSpPr>
+        <p:spPr>
+          <a:xfrm>
+            <a:off x="457200" y="310896"/>
+            <a:ext cx="82296" cy="82296"/>
+          </a:xfrm>
+          <a:prstGeom prst="ellipse">
+            <a:avLst/>
+          </a:prstGeom>
+          <a:solidFill>
+            <a:srgbClr val="3DB88B"/>
+          </a:solidFill>
+          <a:ln>
+            <a:noFill/>
+          </a:ln>
+          <a:effectLst/>
+        </p:spPr>
+        <p:style>
+          <a:lnRef idx="1">
+            <a:schemeClr val="accent1"/>
+          </a:lnRef>
+          <a:fillRef idx="3">
+            <a:schemeClr val="accent1"/>
+          </a:fillRef>
+          <a:effectRef idx="2">
+            <a:schemeClr val="accent1"/>
+          </a:effectRef>
+          <a:fontRef idx="minor">
+            <a:schemeClr val="lt1"/>
+          </a:fontRef>
+        </p:style>
+        <p:txBody>
+          <a:bodyPr rtlCol="0" anchor="ctr"/>
+          <a:lstStyle/>
+          <a:p>
+            <a:pPr algn="ctr"/>
+          </a:p>
+        </p:txBody>
+      </p:sp>
+      <p:sp>
+        <p:nvSpPr>
+          <p:cNvPr id="3" name="TextBox 2"/>
+          <p:cNvSpPr txBox="1"/>
+          <p:nvPr/>
+        </p:nvSpPr>
+        <p:spPr>
+          <a:xfrm>
+            <a:off x="621792" y="256032"/>
+            <a:ext cx="2377440" cy="274320"/>
+          </a:xfrm>
+          <a:prstGeom prst="rect">
+            <a:avLst/>
+          </a:prstGeom>
+          <a:noFill/>
+        </p:spPr>
+        <p:txBody>
+          <a:bodyPr wrap="square">
+            <a:spAutoFit/>
+          </a:bodyPr>
+          <a:lstStyle/>
+          <a:p>
+            <a:pPr algn="l"/>
+            <a:r>
+              <a:rPr sz="1300" b="1">
+                <a:solidFill>
+                  <a:srgbClr val="F4F8FB"/>
+                </a:solidFill>
+                <a:latin typeface="Consolas"/>
+              </a:rPr>
+              <a:t>LHAMS</a:t>
+            </a:r>
+          </a:p>
+        </p:txBody>
+      </p:sp>
+      <p:sp>
+        <p:nvSpPr>
+          <p:cNvPr id="4" name="TextBox 3"/>
+          <p:cNvSpPr txBox="1"/>
+          <p:nvPr/>
+        </p:nvSpPr>
+        <p:spPr>
+          <a:xfrm>
+            <a:off x="1417320" y="265176"/>
+            <a:ext cx="3657600" cy="256032"/>
+          </a:xfrm>
+          <a:prstGeom prst="rect">
+            <a:avLst/>
+          </a:prstGeom>
+          <a:noFill/>
+        </p:spPr>
+        <p:txBody>
+          <a:bodyPr wrap="square">
+            <a:spAutoFit/>
+          </a:bodyPr>
+          <a:lstStyle/>
+          <a:p>
+            <a:pPr algn="l"/>
+            <a:r>
+              <a:rPr sz="1050" b="0">
+                <a:solidFill>
+                  <a:srgbClr val="6E7E8E"/>
+                </a:solidFill>
+                <a:latin typeface="맑은 고딕"/>
+              </a:rPr>
+              <a:t>보안 감사 시스템 세미나</a:t>
+            </a:r>
+          </a:p>
+        </p:txBody>
+      </p:sp>
+      <p:sp>
+        <p:nvSpPr>
+          <p:cNvPr id="5" name="TextBox 4"/>
+          <p:cNvSpPr txBox="1"/>
+          <p:nvPr/>
+        </p:nvSpPr>
+        <p:spPr>
+          <a:xfrm>
+            <a:off x="8778240" y="265176"/>
+            <a:ext cx="2926080" cy="256032"/>
+          </a:xfrm>
+          <a:prstGeom prst="rect">
+            <a:avLst/>
+          </a:prstGeom>
+          <a:noFill/>
+        </p:spPr>
+        <p:txBody>
+          <a:bodyPr wrap="square">
+            <a:spAutoFit/>
+          </a:bodyPr>
+          <a:lstStyle/>
+          <a:p>
+            <a:pPr algn="r"/>
+            <a:r>
+              <a:rPr sz="1000" b="0">
+                <a:solidFill>
+                  <a:srgbClr val="6E7E8E"/>
+                </a:solidFill>
+                <a:latin typeface="Consolas"/>
+              </a:rPr>
+              <a:t>11 — 소스맵·백엔드</a:t>
+            </a:r>
+          </a:p>
+        </p:txBody>
+      </p:sp>
+      <p:cxnSp>
+        <p:nvCxnSpPr>
+          <p:cNvPr id="6" name="Connector 5"/>
+          <p:cNvCxnSpPr/>
+          <p:nvPr/>
+        </p:nvCxnSpPr>
+        <p:spPr>
+          <a:xfrm>
+            <a:off x="457200" y="658368"/>
+            <a:ext cx="11274552" cy="0"/>
+          </a:xfrm>
+          <a:prstGeom prst="line">
+            <a:avLst/>
+          </a:prstGeom>
+          <a:ln w="9525">
+            <a:solidFill>
+              <a:srgbClr val="24303C"/>
+            </a:solidFill>
+          </a:ln>
+        </p:spPr>
+        <p:style>
+          <a:lnRef idx="2">
+            <a:schemeClr val="accent1"/>
+          </a:lnRef>
+          <a:fillRef idx="0">
+            <a:schemeClr val="accent1"/>
+          </a:fillRef>
+          <a:effectRef idx="1">
+            <a:schemeClr val="accent1"/>
+          </a:effectRef>
+          <a:fontRef idx="minor">
+            <a:schemeClr val="tx1"/>
+          </a:fontRef>
+        </p:style>
+      </p:cxnSp>
+      <p:sp>
+        <p:nvSpPr>
+          <p:cNvPr id="7" name="TextBox 6"/>
+          <p:cNvSpPr txBox="1"/>
+          <p:nvPr/>
+        </p:nvSpPr>
+        <p:spPr>
+          <a:xfrm>
+            <a:off x="10881360" y="6473952"/>
+            <a:ext cx="822960" cy="274320"/>
+          </a:xfrm>
+          <a:prstGeom prst="rect">
+            <a:avLst/>
+          </a:prstGeom>
+          <a:noFill/>
+        </p:spPr>
+        <p:txBody>
+          <a:bodyPr wrap="square">
+            <a:spAutoFit/>
+          </a:bodyPr>
+          <a:lstStyle/>
+          <a:p>
+            <a:pPr algn="r"/>
+            <a:r>
+              <a:rPr sz="1000" b="0">
+                <a:solidFill>
+                  <a:srgbClr val="6E7E8E"/>
+                </a:solidFill>
+                <a:latin typeface="Consolas"/>
+              </a:rPr>
+              <a:t>18 / 24</a:t>
+            </a:r>
+          </a:p>
+        </p:txBody>
+      </p:sp>
+      <p:sp>
+        <p:nvSpPr>
+          <p:cNvPr id="8" name="Rectangle 7"/>
+          <p:cNvSpPr/>
+          <p:nvPr/>
+        </p:nvSpPr>
+        <p:spPr>
+          <a:xfrm>
+            <a:off x="457200" y="923544"/>
+            <a:ext cx="201168" cy="17373"/>
+          </a:xfrm>
+          <a:prstGeom prst="rect">
+            <a:avLst/>
+          </a:prstGeom>
+          <a:solidFill>
+            <a:srgbClr val="7FB3D5"/>
+          </a:solidFill>
+          <a:ln>
+            <a:noFill/>
+          </a:ln>
+          <a:effectLst/>
+        </p:spPr>
+        <p:style>
+          <a:lnRef idx="1">
+            <a:schemeClr val="accent1"/>
+          </a:lnRef>
+          <a:fillRef idx="3">
+            <a:schemeClr val="accent1"/>
+          </a:fillRef>
+          <a:effectRef idx="2">
+            <a:schemeClr val="accent1"/>
+          </a:effectRef>
+          <a:fontRef idx="minor">
+            <a:schemeClr val="lt1"/>
+          </a:fontRef>
+        </p:style>
+        <p:txBody>
+          <a:bodyPr rtlCol="0" anchor="ctr"/>
+          <a:lstStyle/>
+          <a:p>
+            <a:pPr algn="ctr"/>
+          </a:p>
+        </p:txBody>
+      </p:sp>
+      <p:sp>
+        <p:nvSpPr>
+          <p:cNvPr id="9" name="TextBox 8"/>
+          <p:cNvSpPr txBox="1"/>
+          <p:nvPr/>
+        </p:nvSpPr>
+        <p:spPr>
+          <a:xfrm>
+            <a:off x="731520" y="841248"/>
+            <a:ext cx="7315200" cy="274320"/>
+          </a:xfrm>
+          <a:prstGeom prst="rect">
+            <a:avLst/>
+          </a:prstGeom>
+          <a:noFill/>
+        </p:spPr>
+        <p:txBody>
+          <a:bodyPr wrap="square">
+            <a:spAutoFit/>
+          </a:bodyPr>
+          <a:lstStyle/>
+          <a:p>
+            <a:pPr algn="l"/>
+            <a:r>
+              <a:rPr sz="1150" b="1">
+                <a:solidFill>
+                  <a:srgbClr val="7FB3D5"/>
+                </a:solidFill>
+                <a:latin typeface="Consolas"/>
+              </a:rPr>
+              <a:t>11-1 · SOURCE MAP (BACKEND)</a:t>
+            </a:r>
+          </a:p>
+        </p:txBody>
+      </p:sp>
+      <p:sp>
+        <p:nvSpPr>
+          <p:cNvPr id="10" name="TextBox 9"/>
+          <p:cNvSpPr txBox="1"/>
+          <p:nvPr/>
+        </p:nvSpPr>
+        <p:spPr>
+          <a:xfrm>
+            <a:off x="457200" y="1170432"/>
+            <a:ext cx="11247120" cy="822960"/>
+          </a:xfrm>
+          <a:prstGeom prst="rect">
+            <a:avLst/>
+          </a:prstGeom>
+          <a:noFill/>
+        </p:spPr>
+        <p:txBody>
+          <a:bodyPr wrap="square">
+            <a:spAutoFit/>
+          </a:bodyPr>
+          <a:lstStyle/>
+          <a:p>
+            <a:pPr algn="l"/>
+            <a:r>
+              <a:rPr sz="2800" b="1">
+                <a:solidFill>
+                  <a:srgbClr val="F4F8FB"/>
+                </a:solidFill>
+                <a:latin typeface="맑은 고딕"/>
+              </a:rPr>
+              <a:t>어떤 코드가 무엇을 하는가 — Python 백엔드</a:t>
+            </a:r>
+          </a:p>
+        </p:txBody>
+      </p:sp>
+      <p:sp>
+        <p:nvSpPr>
+          <p:cNvPr id="11" name="TextBox 10"/>
+          <p:cNvSpPr txBox="1"/>
+          <p:nvPr/>
+        </p:nvSpPr>
+        <p:spPr>
+          <a:xfrm>
+            <a:off x="457200" y="1737360"/>
+            <a:ext cx="3017520" cy="274320"/>
+          </a:xfrm>
+          <a:prstGeom prst="rect">
+            <a:avLst/>
+          </a:prstGeom>
+          <a:noFill/>
+        </p:spPr>
+        <p:txBody>
+          <a:bodyPr wrap="square">
+            <a:spAutoFit/>
+          </a:bodyPr>
+          <a:lstStyle/>
+          <a:p>
+            <a:pPr algn="l"/>
+            <a:r>
+              <a:rPr sz="1000" b="1">
+                <a:solidFill>
+                  <a:srgbClr val="6E7E8E"/>
+                </a:solidFill>
+                <a:latin typeface="Consolas"/>
+              </a:rPr>
+              <a:t>구성 요소</a:t>
+            </a:r>
+          </a:p>
+        </p:txBody>
+      </p:sp>
+      <p:sp>
+        <p:nvSpPr>
+          <p:cNvPr id="12" name="TextBox 11"/>
+          <p:cNvSpPr txBox="1"/>
+          <p:nvPr/>
+        </p:nvSpPr>
+        <p:spPr>
+          <a:xfrm>
+            <a:off x="3611879" y="1737360"/>
+            <a:ext cx="7772400" cy="274320"/>
+          </a:xfrm>
+          <a:prstGeom prst="rect">
+            <a:avLst/>
+          </a:prstGeom>
+          <a:noFill/>
+        </p:spPr>
+        <p:txBody>
+          <a:bodyPr wrap="square">
+            <a:spAutoFit/>
+          </a:bodyPr>
+          <a:lstStyle/>
+          <a:p>
+            <a:pPr algn="l"/>
+            <a:r>
+              <a:rPr sz="1000" b="1">
+                <a:solidFill>
+                  <a:srgbClr val="6E7E8E"/>
+                </a:solidFill>
+                <a:latin typeface="Consolas"/>
+              </a:rPr>
+              <a:t>역할</a:t>
+            </a:r>
+          </a:p>
+        </p:txBody>
+      </p:sp>
+      <p:cxnSp>
+        <p:nvCxnSpPr>
+          <p:cNvPr id="13" name="Connector 12"/>
+          <p:cNvCxnSpPr/>
+          <p:nvPr/>
+        </p:nvCxnSpPr>
+        <p:spPr>
+          <a:xfrm>
+            <a:off x="457200" y="2048255"/>
+            <a:ext cx="10927080" cy="0"/>
+          </a:xfrm>
+          <a:prstGeom prst="line">
+            <a:avLst/>
+          </a:prstGeom>
+          <a:ln w="9525">
+            <a:solidFill>
+              <a:srgbClr val="24303C"/>
+            </a:solidFill>
+          </a:ln>
+        </p:spPr>
+        <p:style>
+          <a:lnRef idx="2">
+            <a:schemeClr val="accent1"/>
+          </a:lnRef>
+          <a:fillRef idx="0">
+            <a:schemeClr val="accent1"/>
+          </a:fillRef>
+          <a:effectRef idx="1">
+            <a:schemeClr val="accent1"/>
+          </a:effectRef>
+          <a:fontRef idx="minor">
+            <a:schemeClr val="tx1"/>
+          </a:fontRef>
+        </p:style>
+      </p:cxnSp>
+      <p:sp>
+        <p:nvSpPr>
+          <p:cNvPr id="14" name="TextBox 13"/>
+          <p:cNvSpPr txBox="1"/>
+          <p:nvPr/>
+        </p:nvSpPr>
+        <p:spPr>
+          <a:xfrm>
+            <a:off x="457200" y="2157984"/>
+            <a:ext cx="3017520" cy="384048"/>
+          </a:xfrm>
+          <a:prstGeom prst="rect">
+            <a:avLst/>
+          </a:prstGeom>
+          <a:noFill/>
+        </p:spPr>
+        <p:txBody>
+          <a:bodyPr wrap="square">
+            <a:spAutoFit/>
+          </a:bodyPr>
+          <a:lstStyle/>
+          <a:p>
+            <a:pPr algn="l"/>
+            <a:r>
+              <a:rPr sz="1200" b="1">
+                <a:solidFill>
+                  <a:srgbClr val="7FB3D5"/>
+                </a:solidFill>
+                <a:latin typeface="Consolas"/>
+              </a:rPr>
+              <a:t>ConfigStore</a:t>
+            </a:r>
+          </a:p>
+        </p:txBody>
+      </p:sp>
+      <p:sp>
+        <p:nvSpPr>
+          <p:cNvPr id="15" name="TextBox 14"/>
+          <p:cNvSpPr txBox="1"/>
+          <p:nvPr/>
+        </p:nvSpPr>
+        <p:spPr>
+          <a:xfrm>
+            <a:off x="3611879" y="2157984"/>
+            <a:ext cx="7772400" cy="384048"/>
+          </a:xfrm>
+          <a:prstGeom prst="rect">
+            <a:avLst/>
+          </a:prstGeom>
+          <a:noFill/>
+        </p:spPr>
+        <p:txBody>
+          <a:bodyPr wrap="square">
+            <a:spAutoFit/>
+          </a:bodyPr>
+          <a:lstStyle/>
+          <a:p>
+            <a:pPr algn="l"/>
+            <a:r>
+              <a:rPr sz="1150" b="0">
+                <a:solidFill>
+                  <a:srgbClr val="C9D4DF"/>
+                </a:solidFill>
+                <a:latin typeface="맑은 고딕"/>
+              </a:rPr>
+              <a:t>data/config.json 로드·저장, 저장할 때마다 config_backups/에 자동 백업(최근 20개 보관)</a:t>
+            </a:r>
+          </a:p>
+        </p:txBody>
+      </p:sp>
+      <p:sp>
+        <p:nvSpPr>
+          <p:cNvPr id="16" name="TextBox 15"/>
+          <p:cNvSpPr txBox="1"/>
+          <p:nvPr/>
+        </p:nvSpPr>
+        <p:spPr>
+          <a:xfrm>
+            <a:off x="457200" y="2542032"/>
+            <a:ext cx="3017520" cy="384048"/>
+          </a:xfrm>
+          <a:prstGeom prst="rect">
+            <a:avLst/>
+          </a:prstGeom>
+          <a:noFill/>
+        </p:spPr>
+        <p:txBody>
+          <a:bodyPr wrap="square">
+            <a:spAutoFit/>
+          </a:bodyPr>
+          <a:lstStyle/>
+          <a:p>
+            <a:pPr algn="l"/>
+            <a:r>
+              <a:rPr sz="1200" b="1">
+                <a:solidFill>
+                  <a:srgbClr val="7FB3D5"/>
+                </a:solidFill>
+                <a:latin typeface="Consolas"/>
+              </a:rPr>
+              <a:t>WatchManager</a:t>
+            </a:r>
+          </a:p>
+        </p:txBody>
+      </p:sp>
+      <p:sp>
+        <p:nvSpPr>
+          <p:cNvPr id="17" name="TextBox 16"/>
+          <p:cNvSpPr txBox="1"/>
+          <p:nvPr/>
+        </p:nvSpPr>
+        <p:spPr>
+          <a:xfrm>
+            <a:off x="3611879" y="2542032"/>
+            <a:ext cx="7772400" cy="384048"/>
+          </a:xfrm>
+          <a:prstGeom prst="rect">
+            <a:avLst/>
+          </a:prstGeom>
+          <a:noFill/>
+        </p:spPr>
+        <p:txBody>
+          <a:bodyPr wrap="square">
+            <a:spAutoFit/>
+          </a:bodyPr>
+          <a:lstStyle/>
+          <a:p>
+            <a:pPr algn="l"/>
+            <a:r>
+              <a:rPr sz="1150" b="0">
+                <a:solidFill>
+                  <a:srgbClr val="C9D4DF"/>
+                </a:solidFill>
+                <a:latin typeface="맑은 고딕"/>
+              </a:rPr>
+              <a:t>감시 경로 등록·on/off·재귀 스케줄링, 실제 감시 성공 여부(active)·실패 사유(error) 추적</a:t>
+            </a:r>
+          </a:p>
+        </p:txBody>
+      </p:sp>
+      <p:sp>
+        <p:nvSpPr>
+          <p:cNvPr id="18" name="TextBox 17"/>
+          <p:cNvSpPr txBox="1"/>
+          <p:nvPr/>
+        </p:nvSpPr>
+        <p:spPr>
+          <a:xfrm>
+            <a:off x="457200" y="2926079"/>
+            <a:ext cx="3017520" cy="384048"/>
+          </a:xfrm>
+          <a:prstGeom prst="rect">
+            <a:avLst/>
+          </a:prstGeom>
+          <a:noFill/>
+        </p:spPr>
+        <p:txBody>
+          <a:bodyPr wrap="square">
+            <a:spAutoFit/>
+          </a:bodyPr>
+          <a:lstStyle/>
+          <a:p>
+            <a:pPr algn="l"/>
+            <a:r>
+              <a:rPr sz="1200" b="1">
+                <a:solidFill>
+                  <a:srgbClr val="7FB3D5"/>
+                </a:solidFill>
+                <a:latin typeface="Consolas"/>
+              </a:rPr>
+              <a:t>QuarantineStore</a:t>
+            </a:r>
+          </a:p>
+        </p:txBody>
+      </p:sp>
+      <p:sp>
+        <p:nvSpPr>
+          <p:cNvPr id="19" name="TextBox 18"/>
+          <p:cNvSpPr txBox="1"/>
+          <p:nvPr/>
+        </p:nvSpPr>
+        <p:spPr>
+          <a:xfrm>
+            <a:off x="3611879" y="2926079"/>
+            <a:ext cx="7772400" cy="384048"/>
+          </a:xfrm>
+          <a:prstGeom prst="rect">
+            <a:avLst/>
+          </a:prstGeom>
+          <a:noFill/>
+        </p:spPr>
+        <p:txBody>
+          <a:bodyPr wrap="square">
+            <a:spAutoFit/>
+          </a:bodyPr>
+          <a:lstStyle/>
+          <a:p>
+            <a:pPr algn="l"/>
+            <a:r>
+              <a:rPr sz="1150" b="0">
+                <a:solidFill>
+                  <a:srgbClr val="C9D4DF"/>
+                </a:solidFill>
+                <a:latin typeface="맑은 고딕"/>
+              </a:rPr>
+              <a:t>격리 파일의 원본 경로·시각·사유 기록, 복원·영구삭제 처리</a:t>
+            </a:r>
+          </a:p>
+        </p:txBody>
+      </p:sp>
+      <p:sp>
+        <p:nvSpPr>
+          <p:cNvPr id="20" name="TextBox 19"/>
+          <p:cNvSpPr txBox="1"/>
+          <p:nvPr/>
+        </p:nvSpPr>
+        <p:spPr>
+          <a:xfrm>
+            <a:off x="457200" y="3310127"/>
+            <a:ext cx="3017520" cy="384048"/>
+          </a:xfrm>
+          <a:prstGeom prst="rect">
+            <a:avLst/>
+          </a:prstGeom>
+          <a:noFill/>
+        </p:spPr>
+        <p:txBody>
+          <a:bodyPr wrap="square">
+            <a:spAutoFit/>
+          </a:bodyPr>
+          <a:lstStyle/>
+          <a:p>
+            <a:pPr algn="l"/>
+            <a:r>
+              <a:rPr sz="1200" b="1">
+                <a:solidFill>
+                  <a:srgbClr val="7FB3D5"/>
+                </a:solidFill>
+                <a:latin typeface="Consolas"/>
+              </a:rPr>
+              <a:t>ChecklistStore</a:t>
+            </a:r>
+          </a:p>
+        </p:txBody>
+      </p:sp>
+      <p:sp>
+        <p:nvSpPr>
+          <p:cNvPr id="21" name="TextBox 20"/>
+          <p:cNvSpPr txBox="1"/>
+          <p:nvPr/>
+        </p:nvSpPr>
+        <p:spPr>
+          <a:xfrm>
+            <a:off x="3611879" y="3310127"/>
+            <a:ext cx="7772400" cy="384048"/>
+          </a:xfrm>
+          <a:prstGeom prst="rect">
+            <a:avLst/>
+          </a:prstGeom>
+          <a:noFill/>
+        </p:spPr>
+        <p:txBody>
+          <a:bodyPr wrap="square">
+            <a:spAutoFit/>
+          </a:bodyPr>
+          <a:lstStyle/>
+          <a:p>
+            <a:pPr algn="l"/>
+            <a:r>
+              <a:rPr sz="1150" b="0">
+                <a:solidFill>
+                  <a:srgbClr val="C9D4DF"/>
+                </a:solidFill>
+                <a:latin typeface="맑은 고딕"/>
+              </a:rPr>
+              <a:t>신규 서버 구축 체크리스트 진행 상태(완료자·완료 시각) 관리</a:t>
+            </a:r>
+          </a:p>
+        </p:txBody>
+      </p:sp>
+      <p:sp>
+        <p:nvSpPr>
+          <p:cNvPr id="22" name="TextBox 21"/>
+          <p:cNvSpPr txBox="1"/>
+          <p:nvPr/>
+        </p:nvSpPr>
+        <p:spPr>
+          <a:xfrm>
+            <a:off x="457200" y="3694176"/>
+            <a:ext cx="3017520" cy="384048"/>
+          </a:xfrm>
+          <a:prstGeom prst="rect">
+            <a:avLst/>
+          </a:prstGeom>
+          <a:noFill/>
+        </p:spPr>
+        <p:txBody>
+          <a:bodyPr wrap="square">
+            <a:spAutoFit/>
+          </a:bodyPr>
+          <a:lstStyle/>
+          <a:p>
+            <a:pPr algn="l"/>
+            <a:r>
+              <a:rPr sz="1200" b="1">
+                <a:solidFill>
+                  <a:srgbClr val="7FB3D5"/>
+                </a:solidFill>
+                <a:latin typeface="Consolas"/>
+              </a:rPr>
+              <a:t>AdminAuditLog</a:t>
+            </a:r>
+          </a:p>
+        </p:txBody>
+      </p:sp>
+      <p:sp>
+        <p:nvSpPr>
+          <p:cNvPr id="23" name="TextBox 22"/>
+          <p:cNvSpPr txBox="1"/>
+          <p:nvPr/>
+        </p:nvSpPr>
+        <p:spPr>
+          <a:xfrm>
+            <a:off x="3611879" y="3694176"/>
+            <a:ext cx="7772400" cy="384048"/>
+          </a:xfrm>
+          <a:prstGeom prst="rect">
+            <a:avLst/>
+          </a:prstGeom>
+          <a:noFill/>
+        </p:spPr>
+        <p:txBody>
+          <a:bodyPr wrap="square">
+            <a:spAutoFit/>
+          </a:bodyPr>
+          <a:lstStyle/>
+          <a:p>
+            <a:pPr algn="l"/>
+            <a:r>
+              <a:rPr sz="1150" b="0">
+                <a:solidFill>
+                  <a:srgbClr val="C9D4DF"/>
+                </a:solidFill>
+                <a:latin typeface="맑은 고딕"/>
+              </a:rPr>
+              <a:t>관리자 조작(경로/설정/격리/체크리스트 변경)을 "누가·언제·무엇을" 기준으로 기록</a:t>
+            </a:r>
+          </a:p>
+        </p:txBody>
+      </p:sp>
+      <p:sp>
+        <p:nvSpPr>
+          <p:cNvPr id="24" name="TextBox 23"/>
+          <p:cNvSpPr txBox="1"/>
+          <p:nvPr/>
+        </p:nvSpPr>
+        <p:spPr>
+          <a:xfrm>
+            <a:off x="457200" y="4078224"/>
+            <a:ext cx="3017520" cy="384048"/>
+          </a:xfrm>
+          <a:prstGeom prst="rect">
+            <a:avLst/>
+          </a:prstGeom>
+          <a:noFill/>
+        </p:spPr>
+        <p:txBody>
+          <a:bodyPr wrap="square">
+            <a:spAutoFit/>
+          </a:bodyPr>
+          <a:lstStyle/>
+          <a:p>
+            <a:pPr algn="l"/>
+            <a:r>
+              <a:rPr sz="1200" b="1">
+                <a:solidFill>
+                  <a:srgbClr val="7FB3D5"/>
+                </a:solidFill>
+                <a:latin typeface="Consolas"/>
+              </a:rPr>
+              <a:t>AuditdResolver</a:t>
+            </a:r>
+          </a:p>
+        </p:txBody>
+      </p:sp>
+      <p:sp>
+        <p:nvSpPr>
+          <p:cNvPr id="25" name="TextBox 24"/>
+          <p:cNvSpPr txBox="1"/>
+          <p:nvPr/>
+        </p:nvSpPr>
+        <p:spPr>
+          <a:xfrm>
+            <a:off x="3611879" y="4078224"/>
+            <a:ext cx="7772400" cy="384048"/>
+          </a:xfrm>
+          <a:prstGeom prst="rect">
+            <a:avLst/>
+          </a:prstGeom>
+          <a:noFill/>
+        </p:spPr>
+        <p:txBody>
+          <a:bodyPr wrap="square">
+            <a:spAutoFit/>
+          </a:bodyPr>
+          <a:lstStyle/>
+          <a:p>
+            <a:pPr algn="l"/>
+            <a:r>
+              <a:rPr sz="1150" b="0">
+                <a:solidFill>
+                  <a:srgbClr val="C9D4DF"/>
+                </a:solidFill>
+                <a:latin typeface="맑은 고딕"/>
+              </a:rPr>
+              <a:t>ausearch로 auid(로그인 사용자)·comm(프로세스) 조회 — 파일 소유자와 별개로 실행 주체 특정</a:t>
+            </a:r>
+          </a:p>
+        </p:txBody>
+      </p:sp>
+      <p:sp>
+        <p:nvSpPr>
+          <p:cNvPr id="26" name="TextBox 25"/>
+          <p:cNvSpPr txBox="1"/>
+          <p:nvPr/>
+        </p:nvSpPr>
+        <p:spPr>
+          <a:xfrm>
+            <a:off x="457200" y="4462272"/>
+            <a:ext cx="3017520" cy="384048"/>
+          </a:xfrm>
+          <a:prstGeom prst="rect">
+            <a:avLst/>
+          </a:prstGeom>
+          <a:noFill/>
+        </p:spPr>
+        <p:txBody>
+          <a:bodyPr wrap="square">
+            <a:spAutoFit/>
+          </a:bodyPr>
+          <a:lstStyle/>
+          <a:p>
+            <a:pPr algn="l"/>
+            <a:r>
+              <a:rPr sz="1200" b="1">
+                <a:solidFill>
+                  <a:srgbClr val="7FB3D5"/>
+                </a:solidFill>
+                <a:latin typeface="Consolas"/>
+              </a:rPr>
+              <a:t>LhamsAuditHandler</a:t>
+            </a:r>
+          </a:p>
+        </p:txBody>
+      </p:sp>
+      <p:sp>
+        <p:nvSpPr>
+          <p:cNvPr id="27" name="TextBox 26"/>
+          <p:cNvSpPr txBox="1"/>
+          <p:nvPr/>
+        </p:nvSpPr>
+        <p:spPr>
+          <a:xfrm>
+            <a:off x="3611879" y="4462272"/>
+            <a:ext cx="7772400" cy="384048"/>
+          </a:xfrm>
+          <a:prstGeom prst="rect">
+            <a:avLst/>
+          </a:prstGeom>
+          <a:noFill/>
+        </p:spPr>
+        <p:txBody>
+          <a:bodyPr wrap="square">
+            <a:spAutoFit/>
+          </a:bodyPr>
+          <a:lstStyle/>
+          <a:p>
+            <a:pPr algn="l"/>
+            <a:r>
+              <a:rPr sz="1150" b="0">
+                <a:solidFill>
+                  <a:srgbClr val="C9D4DF"/>
+                </a:solidFill>
+                <a:latin typeface="맑은 고딕"/>
+              </a:rPr>
+              <a:t>watchdog 이벤트 훅 + clamdscan 검사 + JSON 적재 — 파일 감사의 핵심 엔진</a:t>
+            </a:r>
+          </a:p>
+        </p:txBody>
+      </p:sp>
+      <p:sp>
+        <p:nvSpPr>
+          <p:cNvPr id="28" name="TextBox 27"/>
+          <p:cNvSpPr txBox="1"/>
+          <p:nvPr/>
+        </p:nvSpPr>
+        <p:spPr>
+          <a:xfrm>
+            <a:off x="457200" y="4846320"/>
+            <a:ext cx="3017520" cy="384048"/>
+          </a:xfrm>
+          <a:prstGeom prst="rect">
+            <a:avLst/>
+          </a:prstGeom>
+          <a:noFill/>
+        </p:spPr>
+        <p:txBody>
+          <a:bodyPr wrap="square">
+            <a:spAutoFit/>
+          </a:bodyPr>
+          <a:lstStyle/>
+          <a:p>
+            <a:pPr algn="l"/>
+            <a:r>
+              <a:rPr sz="1200" b="1">
+                <a:solidFill>
+                  <a:srgbClr val="7FB3D5"/>
+                </a:solidFill>
+                <a:latin typeface="Consolas"/>
+              </a:rPr>
+              <a:t>create_api() [Flask]</a:t>
+            </a:r>
+          </a:p>
+        </p:txBody>
+      </p:sp>
+      <p:sp>
+        <p:nvSpPr>
+          <p:cNvPr id="29" name="TextBox 28"/>
+          <p:cNvSpPr txBox="1"/>
+          <p:nvPr/>
+        </p:nvSpPr>
+        <p:spPr>
+          <a:xfrm>
+            <a:off x="3611879" y="4846320"/>
+            <a:ext cx="7772400" cy="384048"/>
+          </a:xfrm>
+          <a:prstGeom prst="rect">
+            <a:avLst/>
+          </a:prstGeom>
+          <a:noFill/>
+        </p:spPr>
+        <p:txBody>
+          <a:bodyPr wrap="square">
+            <a:spAutoFit/>
+          </a:bodyPr>
+          <a:lstStyle/>
+          <a:p>
+            <a:pPr algn="l"/>
+            <a:r>
+              <a:rPr sz="1150" b="0">
+                <a:solidFill>
+                  <a:srgbClr val="C9D4DF"/>
+                </a:solidFill>
+                <a:latin typeface="맑은 고딕"/>
+              </a:rPr>
+              <a:t>/api/config·paths·quarantine·settings·checklist·admin-audit·health·config/export|import 라우팅</a:t>
+            </a:r>
+          </a:p>
+        </p:txBody>
+      </p:sp>
+      <p:sp>
+        <p:nvSpPr>
+          <p:cNvPr id="30" name="Rounded Rectangle 29"/>
+          <p:cNvSpPr/>
+          <p:nvPr/>
+        </p:nvSpPr>
+        <p:spPr>
+          <a:xfrm>
+            <a:off x="457200" y="5349240"/>
+            <a:ext cx="10789920" cy="822960"/>
+          </a:xfrm>
+          <a:prstGeom prst="roundRect">
+            <a:avLst/>
+          </a:prstGeom>
+          <a:solidFill>
+            <a:srgbClr val="1A2430"/>
+          </a:solidFill>
+          <a:ln>
+            <a:noFill/>
+          </a:ln>
+          <a:effectLst/>
+        </p:spPr>
+        <p:style>
+          <a:lnRef idx="1">
+            <a:schemeClr val="accent1"/>
+          </a:lnRef>
+          <a:fillRef idx="3">
+            <a:schemeClr val="accent1"/>
+          </a:fillRef>
+          <a:effectRef idx="2">
+            <a:schemeClr val="accent1"/>
+          </a:effectRef>
+          <a:fontRef idx="minor">
+            <a:schemeClr val="lt1"/>
+          </a:fontRef>
+        </p:style>
+        <p:txBody>
+          <a:bodyPr rtlCol="0" anchor="ctr"/>
+          <a:lstStyle/>
+          <a:p>
+            <a:pPr algn="ctr"/>
+          </a:p>
+        </p:txBody>
+      </p:sp>
+      <p:sp>
+        <p:nvSpPr>
+          <p:cNvPr id="31" name="TextBox 30"/>
+          <p:cNvSpPr txBox="1"/>
+          <p:nvPr/>
+        </p:nvSpPr>
+        <p:spPr>
+          <a:xfrm>
+            <a:off x="685800" y="5468112"/>
+            <a:ext cx="2011680" cy="274320"/>
+          </a:xfrm>
+          <a:prstGeom prst="rect">
+            <a:avLst/>
+          </a:prstGeom>
+          <a:noFill/>
+        </p:spPr>
+        <p:txBody>
+          <a:bodyPr wrap="square">
+            <a:spAutoFit/>
+          </a:bodyPr>
+          <a:lstStyle/>
+          <a:p>
+            <a:pPr algn="l"/>
+            <a:r>
+              <a:rPr sz="1050" b="1">
+                <a:solidFill>
+                  <a:srgbClr val="7FB3D5"/>
+                </a:solidFill>
+                <a:latin typeface="Consolas"/>
+              </a:rPr>
+              <a:t>IMPACT</a:t>
+            </a:r>
+          </a:p>
+        </p:txBody>
+      </p:sp>
+      <p:sp>
+        <p:nvSpPr>
+          <p:cNvPr id="32" name="TextBox 31"/>
+          <p:cNvSpPr txBox="1"/>
+          <p:nvPr/>
+        </p:nvSpPr>
+        <p:spPr>
+          <a:xfrm>
+            <a:off x="685800" y="5760720"/>
+            <a:ext cx="10332720" cy="320040"/>
+          </a:xfrm>
+          <a:prstGeom prst="rect">
+            <a:avLst/>
+          </a:prstGeom>
+          <a:noFill/>
+        </p:spPr>
+        <p:txBody>
+          <a:bodyPr wrap="square">
+            <a:spAutoFit/>
+          </a:bodyPr>
+          <a:lstStyle/>
+          <a:p>
+            <a:pPr algn="l"/>
+            <a:r>
+              <a:rPr sz="1300" b="0">
+                <a:solidFill>
+                  <a:srgbClr val="C9D4DF"/>
+                </a:solidFill>
+                <a:latin typeface="맑은 고딕"/>
+              </a:rPr>
+              <a:t>파일 하나가 감시·검사·관리 API·감사·백업까지 담당하는 대신, 역할별 클래스로 분리해 유지보수와 신규 기능 추가가 쉬워졌습니다.</a:t>
+            </a:r>
+          </a:p>
+        </p:txBody>
+      </p:sp>
+    </p:spTree>
+  </p:cSld>
+  <p:clrMapOvr>
+    <a:masterClrMapping/>
+  </p:clrMapOvr>
+</p:sld>
+</file>
+
+<file path=ppt/slides/slide22.xml><?xml version="1.0" encoding="utf-8"?>
+<p:sld xmlns:a="http://schemas.openxmlformats.org/drawingml/2006/main" xmlns:p="http://schemas.openxmlformats.org/presentationml/2006/main" xmlns:r="http://schemas.openxmlformats.org/officeDocument/2006/relationships">
+  <p:cSld>
+    <p:bg>
+      <p:bgPr>
+        <a:solidFill>
+          <a:srgbClr val="0E141B"/>
+        </a:solidFill>
+        <a:effectLst/>
+      </p:bgPr>
+    </p:bg>
+    <p:spTree>
+      <p:nvGrpSpPr>
+        <p:cNvPr id="1" name=""/>
+        <p:cNvGrpSpPr/>
+        <p:nvPr/>
+      </p:nvGrpSpPr>
+      <p:grpSpPr/>
+      <p:sp>
+        <p:nvSpPr>
+          <p:cNvPr id="2" name="Oval 1"/>
+          <p:cNvSpPr/>
+          <p:nvPr/>
+        </p:nvSpPr>
+        <p:spPr>
+          <a:xfrm>
+            <a:off x="457200" y="310896"/>
+            <a:ext cx="82296" cy="82296"/>
+          </a:xfrm>
+          <a:prstGeom prst="ellipse">
+            <a:avLst/>
+          </a:prstGeom>
+          <a:solidFill>
+            <a:srgbClr val="3DB88B"/>
+          </a:solidFill>
+          <a:ln>
+            <a:noFill/>
+          </a:ln>
+          <a:effectLst/>
+        </p:spPr>
+        <p:style>
+          <a:lnRef idx="1">
+            <a:schemeClr val="accent1"/>
+          </a:lnRef>
+          <a:fillRef idx="3">
+            <a:schemeClr val="accent1"/>
+          </a:fillRef>
+          <a:effectRef idx="2">
+            <a:schemeClr val="accent1"/>
+          </a:effectRef>
+          <a:fontRef idx="minor">
+            <a:schemeClr val="lt1"/>
+          </a:fontRef>
+        </p:style>
+        <p:txBody>
+          <a:bodyPr rtlCol="0" anchor="ctr"/>
+          <a:lstStyle/>
+          <a:p>
+            <a:pPr algn="ctr"/>
+          </a:p>
+        </p:txBody>
+      </p:sp>
+      <p:sp>
+        <p:nvSpPr>
+          <p:cNvPr id="3" name="TextBox 2"/>
+          <p:cNvSpPr txBox="1"/>
+          <p:nvPr/>
+        </p:nvSpPr>
+        <p:spPr>
+          <a:xfrm>
+            <a:off x="621792" y="256032"/>
+            <a:ext cx="2377440" cy="274320"/>
+          </a:xfrm>
+          <a:prstGeom prst="rect">
+            <a:avLst/>
+          </a:prstGeom>
+          <a:noFill/>
+        </p:spPr>
+        <p:txBody>
+          <a:bodyPr wrap="square">
+            <a:spAutoFit/>
+          </a:bodyPr>
+          <a:lstStyle/>
+          <a:p>
+            <a:pPr algn="l"/>
+            <a:r>
+              <a:rPr sz="1300" b="1">
+                <a:solidFill>
+                  <a:srgbClr val="F4F8FB"/>
+                </a:solidFill>
+                <a:latin typeface="Consolas"/>
+              </a:rPr>
+              <a:t>LHAMS</a:t>
+            </a:r>
+          </a:p>
+        </p:txBody>
+      </p:sp>
+      <p:sp>
+        <p:nvSpPr>
+          <p:cNvPr id="4" name="TextBox 3"/>
+          <p:cNvSpPr txBox="1"/>
+          <p:nvPr/>
+        </p:nvSpPr>
+        <p:spPr>
+          <a:xfrm>
+            <a:off x="1417320" y="265176"/>
+            <a:ext cx="3657600" cy="256032"/>
+          </a:xfrm>
+          <a:prstGeom prst="rect">
+            <a:avLst/>
+          </a:prstGeom>
+          <a:noFill/>
+        </p:spPr>
+        <p:txBody>
+          <a:bodyPr wrap="square">
+            <a:spAutoFit/>
+          </a:bodyPr>
+          <a:lstStyle/>
+          <a:p>
+            <a:pPr algn="l"/>
+            <a:r>
+              <a:rPr sz="1050" b="0">
+                <a:solidFill>
+                  <a:srgbClr val="6E7E8E"/>
+                </a:solidFill>
+                <a:latin typeface="맑은 고딕"/>
+              </a:rPr>
+              <a:t>보안 감사 시스템 세미나</a:t>
+            </a:r>
+          </a:p>
+        </p:txBody>
+      </p:sp>
+      <p:sp>
+        <p:nvSpPr>
+          <p:cNvPr id="5" name="TextBox 4"/>
+          <p:cNvSpPr txBox="1"/>
+          <p:nvPr/>
+        </p:nvSpPr>
+        <p:spPr>
+          <a:xfrm>
+            <a:off x="8778240" y="265176"/>
+            <a:ext cx="2926080" cy="256032"/>
+          </a:xfrm>
+          <a:prstGeom prst="rect">
+            <a:avLst/>
+          </a:prstGeom>
+          <a:noFill/>
+        </p:spPr>
+        <p:txBody>
+          <a:bodyPr wrap="square">
+            <a:spAutoFit/>
+          </a:bodyPr>
+          <a:lstStyle/>
+          <a:p>
+            <a:pPr algn="r"/>
+            <a:r>
+              <a:rPr sz="1000" b="0">
+                <a:solidFill>
+                  <a:srgbClr val="6E7E8E"/>
+                </a:solidFill>
+                <a:latin typeface="Consolas"/>
+              </a:rPr>
+              <a:t>11 — 소스맵·프론트</a:t>
+            </a:r>
+          </a:p>
+        </p:txBody>
+      </p:sp>
+      <p:cxnSp>
+        <p:nvCxnSpPr>
+          <p:cNvPr id="6" name="Connector 5"/>
+          <p:cNvCxnSpPr/>
+          <p:nvPr/>
+        </p:nvCxnSpPr>
+        <p:spPr>
+          <a:xfrm>
+            <a:off x="457200" y="658368"/>
+            <a:ext cx="11274552" cy="0"/>
+          </a:xfrm>
+          <a:prstGeom prst="line">
+            <a:avLst/>
+          </a:prstGeom>
+          <a:ln w="9525">
+            <a:solidFill>
+              <a:srgbClr val="24303C"/>
+            </a:solidFill>
+          </a:ln>
+        </p:spPr>
+        <p:style>
+          <a:lnRef idx="2">
+            <a:schemeClr val="accent1"/>
+          </a:lnRef>
+          <a:fillRef idx="0">
+            <a:schemeClr val="accent1"/>
+          </a:fillRef>
+          <a:effectRef idx="1">
+            <a:schemeClr val="accent1"/>
+          </a:effectRef>
+          <a:fontRef idx="minor">
+            <a:schemeClr val="tx1"/>
+          </a:fontRef>
+        </p:style>
+      </p:cxnSp>
+      <p:sp>
+        <p:nvSpPr>
+          <p:cNvPr id="7" name="TextBox 6"/>
+          <p:cNvSpPr txBox="1"/>
+          <p:nvPr/>
+        </p:nvSpPr>
+        <p:spPr>
+          <a:xfrm>
+            <a:off x="10881360" y="6473952"/>
+            <a:ext cx="822960" cy="274320"/>
+          </a:xfrm>
+          <a:prstGeom prst="rect">
+            <a:avLst/>
+          </a:prstGeom>
+          <a:noFill/>
+        </p:spPr>
+        <p:txBody>
+          <a:bodyPr wrap="square">
+            <a:spAutoFit/>
+          </a:bodyPr>
+          <a:lstStyle/>
+          <a:p>
+            <a:pPr algn="r"/>
+            <a:r>
+              <a:rPr sz="1000" b="0">
+                <a:solidFill>
+                  <a:srgbClr val="6E7E8E"/>
+                </a:solidFill>
+                <a:latin typeface="Consolas"/>
+              </a:rPr>
+              <a:t>19 / 24</a:t>
+            </a:r>
+          </a:p>
+        </p:txBody>
+      </p:sp>
+      <p:sp>
+        <p:nvSpPr>
+          <p:cNvPr id="8" name="Rectangle 7"/>
+          <p:cNvSpPr/>
+          <p:nvPr/>
+        </p:nvSpPr>
+        <p:spPr>
+          <a:xfrm>
+            <a:off x="457200" y="923544"/>
+            <a:ext cx="201168" cy="17373"/>
+          </a:xfrm>
+          <a:prstGeom prst="rect">
+            <a:avLst/>
+          </a:prstGeom>
+          <a:solidFill>
+            <a:srgbClr val="7FB3D5"/>
+          </a:solidFill>
+          <a:ln>
+            <a:noFill/>
+          </a:ln>
+          <a:effectLst/>
+        </p:spPr>
+        <p:style>
+          <a:lnRef idx="1">
+            <a:schemeClr val="accent1"/>
+          </a:lnRef>
+          <a:fillRef idx="3">
+            <a:schemeClr val="accent1"/>
+          </a:fillRef>
+          <a:effectRef idx="2">
+            <a:schemeClr val="accent1"/>
+          </a:effectRef>
+          <a:fontRef idx="minor">
+            <a:schemeClr val="lt1"/>
+          </a:fontRef>
+        </p:style>
+        <p:txBody>
+          <a:bodyPr rtlCol="0" anchor="ctr"/>
+          <a:lstStyle/>
+          <a:p>
+            <a:pPr algn="ctr"/>
+          </a:p>
+        </p:txBody>
+      </p:sp>
+      <p:sp>
+        <p:nvSpPr>
+          <p:cNvPr id="9" name="TextBox 8"/>
+          <p:cNvSpPr txBox="1"/>
+          <p:nvPr/>
+        </p:nvSpPr>
+        <p:spPr>
+          <a:xfrm>
+            <a:off x="731520" y="841248"/>
+            <a:ext cx="7315200" cy="274320"/>
+          </a:xfrm>
+          <a:prstGeom prst="rect">
+            <a:avLst/>
+          </a:prstGeom>
+          <a:noFill/>
+        </p:spPr>
+        <p:txBody>
+          <a:bodyPr wrap="square">
+            <a:spAutoFit/>
+          </a:bodyPr>
+          <a:lstStyle/>
+          <a:p>
+            <a:pPr algn="l"/>
+            <a:r>
+              <a:rPr sz="1150" b="1">
+                <a:solidFill>
+                  <a:srgbClr val="7FB3D5"/>
+                </a:solidFill>
+                <a:latin typeface="Consolas"/>
+              </a:rPr>
+              <a:t>11-2 · SOURCE MAP (FRONTEND)</a:t>
+            </a:r>
+          </a:p>
+        </p:txBody>
+      </p:sp>
+      <p:sp>
+        <p:nvSpPr>
+          <p:cNvPr id="10" name="TextBox 9"/>
+          <p:cNvSpPr txBox="1"/>
+          <p:nvPr/>
+        </p:nvSpPr>
+        <p:spPr>
+          <a:xfrm>
+            <a:off x="457200" y="1170432"/>
+            <a:ext cx="11247120" cy="822960"/>
+          </a:xfrm>
+          <a:prstGeom prst="rect">
+            <a:avLst/>
+          </a:prstGeom>
+          <a:noFill/>
+        </p:spPr>
+        <p:txBody>
+          <a:bodyPr wrap="square">
+            <a:spAutoFit/>
+          </a:bodyPr>
+          <a:lstStyle/>
+          <a:p>
+            <a:pPr algn="l"/>
+            <a:r>
+              <a:rPr sz="2800" b="1">
+                <a:solidFill>
+                  <a:srgbClr val="F4F8FB"/>
+                </a:solidFill>
+                <a:latin typeface="맑은 고딕"/>
+              </a:rPr>
+              <a:t>어떤 코드가 무엇을 하는가 — React 프론트엔드</a:t>
+            </a:r>
+          </a:p>
+        </p:txBody>
+      </p:sp>
+      <p:sp>
+        <p:nvSpPr>
+          <p:cNvPr id="11" name="TextBox 10"/>
+          <p:cNvSpPr txBox="1"/>
+          <p:nvPr/>
+        </p:nvSpPr>
+        <p:spPr>
+          <a:xfrm>
+            <a:off x="457200" y="1737360"/>
+            <a:ext cx="3017520" cy="274320"/>
+          </a:xfrm>
+          <a:prstGeom prst="rect">
+            <a:avLst/>
+          </a:prstGeom>
+          <a:noFill/>
+        </p:spPr>
+        <p:txBody>
+          <a:bodyPr wrap="square">
+            <a:spAutoFit/>
+          </a:bodyPr>
+          <a:lstStyle/>
+          <a:p>
+            <a:pPr algn="l"/>
+            <a:r>
+              <a:rPr sz="1000" b="1">
+                <a:solidFill>
+                  <a:srgbClr val="6E7E8E"/>
+                </a:solidFill>
+                <a:latin typeface="Consolas"/>
+              </a:rPr>
+              <a:t>구성 요소</a:t>
+            </a:r>
+          </a:p>
+        </p:txBody>
+      </p:sp>
+      <p:sp>
+        <p:nvSpPr>
+          <p:cNvPr id="12" name="TextBox 11"/>
+          <p:cNvSpPr txBox="1"/>
+          <p:nvPr/>
+        </p:nvSpPr>
+        <p:spPr>
+          <a:xfrm>
+            <a:off x="3611879" y="1737360"/>
+            <a:ext cx="7772400" cy="274320"/>
+          </a:xfrm>
+          <a:prstGeom prst="rect">
+            <a:avLst/>
+          </a:prstGeom>
+          <a:noFill/>
+        </p:spPr>
+        <p:txBody>
+          <a:bodyPr wrap="square">
+            <a:spAutoFit/>
+          </a:bodyPr>
+          <a:lstStyle/>
+          <a:p>
+            <a:pPr algn="l"/>
+            <a:r>
+              <a:rPr sz="1000" b="1">
+                <a:solidFill>
+                  <a:srgbClr val="6E7E8E"/>
+                </a:solidFill>
+                <a:latin typeface="Consolas"/>
+              </a:rPr>
+              <a:t>역할</a:t>
+            </a:r>
+          </a:p>
+        </p:txBody>
+      </p:sp>
+      <p:cxnSp>
+        <p:nvCxnSpPr>
+          <p:cNvPr id="13" name="Connector 12"/>
+          <p:cNvCxnSpPr/>
+          <p:nvPr/>
+        </p:nvCxnSpPr>
+        <p:spPr>
+          <a:xfrm>
+            <a:off x="457200" y="2048255"/>
+            <a:ext cx="10927080" cy="0"/>
+          </a:xfrm>
+          <a:prstGeom prst="line">
+            <a:avLst/>
+          </a:prstGeom>
+          <a:ln w="9525">
+            <a:solidFill>
+              <a:srgbClr val="24303C"/>
+            </a:solidFill>
+          </a:ln>
+        </p:spPr>
+        <p:style>
+          <a:lnRef idx="2">
+            <a:schemeClr val="accent1"/>
+          </a:lnRef>
+          <a:fillRef idx="0">
+            <a:schemeClr val="accent1"/>
+          </a:fillRef>
+          <a:effectRef idx="1">
+            <a:schemeClr val="accent1"/>
+          </a:effectRef>
+          <a:fontRef idx="minor">
+            <a:schemeClr val="tx1"/>
+          </a:fontRef>
+        </p:style>
+      </p:cxnSp>
+      <p:sp>
+        <p:nvSpPr>
+          <p:cNvPr id="14" name="TextBox 13"/>
+          <p:cNvSpPr txBox="1"/>
+          <p:nvPr/>
+        </p:nvSpPr>
+        <p:spPr>
+          <a:xfrm>
+            <a:off x="457200" y="2157984"/>
+            <a:ext cx="3017520" cy="329184"/>
+          </a:xfrm>
+          <a:prstGeom prst="rect">
+            <a:avLst/>
+          </a:prstGeom>
+          <a:noFill/>
+        </p:spPr>
+        <p:txBody>
+          <a:bodyPr wrap="square">
+            <a:spAutoFit/>
+          </a:bodyPr>
+          <a:lstStyle/>
+          <a:p>
+            <a:pPr algn="l"/>
+            <a:r>
+              <a:rPr sz="1100" b="1">
+                <a:solidFill>
+                  <a:srgbClr val="7FB3D5"/>
+                </a:solidFill>
+                <a:latin typeface="Consolas"/>
+              </a:rPr>
+              <a:t>App.jsx</a:t>
+            </a:r>
+          </a:p>
+        </p:txBody>
+      </p:sp>
+      <p:sp>
+        <p:nvSpPr>
+          <p:cNvPr id="15" name="TextBox 14"/>
+          <p:cNvSpPr txBox="1"/>
+          <p:nvPr/>
+        </p:nvSpPr>
+        <p:spPr>
+          <a:xfrm>
+            <a:off x="3611879" y="2157984"/>
+            <a:ext cx="7772400" cy="329184"/>
+          </a:xfrm>
+          <a:prstGeom prst="rect">
+            <a:avLst/>
+          </a:prstGeom>
+          <a:noFill/>
+        </p:spPr>
+        <p:txBody>
+          <a:bodyPr wrap="square">
+            <a:spAutoFit/>
+          </a:bodyPr>
+          <a:lstStyle/>
+          <a:p>
+            <a:pPr algn="l"/>
+            <a:r>
+              <a:rPr sz="1050" b="0">
+                <a:solidFill>
+                  <a:srgbClr val="C9D4DF"/>
+                </a:solidFill>
+                <a:latin typeface="맑은 고딕"/>
+              </a:rPr>
+              <a:t>이벤트 3초 폴링 + 시스템 진단(health) 5초 폴링, 요약/대시보드/관리자 탭 라우팅</a:t>
+            </a:r>
+          </a:p>
+        </p:txBody>
+      </p:sp>
+      <p:sp>
+        <p:nvSpPr>
+          <p:cNvPr id="16" name="TextBox 15"/>
+          <p:cNvSpPr txBox="1"/>
+          <p:nvPr/>
+        </p:nvSpPr>
+        <p:spPr>
+          <a:xfrm>
+            <a:off x="457200" y="2487168"/>
+            <a:ext cx="3017520" cy="329184"/>
+          </a:xfrm>
+          <a:prstGeom prst="rect">
+            <a:avLst/>
+          </a:prstGeom>
+          <a:noFill/>
+        </p:spPr>
+        <p:txBody>
+          <a:bodyPr wrap="square">
+            <a:spAutoFit/>
+          </a:bodyPr>
+          <a:lstStyle/>
+          <a:p>
+            <a:pPr algn="l"/>
+            <a:r>
+              <a:rPr sz="1100" b="1">
+                <a:solidFill>
+                  <a:srgbClr val="7FB3D5"/>
+                </a:solidFill>
+                <a:latin typeface="Consolas"/>
+              </a:rPr>
+              <a:t>api.js</a:t>
+            </a:r>
+          </a:p>
+        </p:txBody>
+      </p:sp>
+      <p:sp>
+        <p:nvSpPr>
+          <p:cNvPr id="17" name="TextBox 16"/>
+          <p:cNvSpPr txBox="1"/>
+          <p:nvPr/>
+        </p:nvSpPr>
+        <p:spPr>
+          <a:xfrm>
+            <a:off x="3611879" y="2487168"/>
+            <a:ext cx="7772400" cy="329184"/>
+          </a:xfrm>
+          <a:prstGeom prst="rect">
+            <a:avLst/>
+          </a:prstGeom>
+          <a:noFill/>
+        </p:spPr>
+        <p:txBody>
+          <a:bodyPr wrap="square">
+            <a:spAutoFit/>
+          </a:bodyPr>
+          <a:lstStyle/>
+          <a:p>
+            <a:pPr algn="l"/>
+            <a:r>
+              <a:rPr sz="1050" b="0">
+                <a:solidFill>
+                  <a:srgbClr val="C9D4DF"/>
+                </a:solidFill>
+                <a:latin typeface="맑은 고딕"/>
+              </a:rPr>
+              <a:t>관리 API 래퍼 — 변경 요청마다 작업자(actor)를 자동으로 실어 보냄</a:t>
+            </a:r>
+          </a:p>
+        </p:txBody>
+      </p:sp>
+      <p:sp>
+        <p:nvSpPr>
+          <p:cNvPr id="18" name="TextBox 17"/>
+          <p:cNvSpPr txBox="1"/>
+          <p:nvPr/>
+        </p:nvSpPr>
+        <p:spPr>
+          <a:xfrm>
+            <a:off x="457200" y="2816351"/>
+            <a:ext cx="3017520" cy="329184"/>
+          </a:xfrm>
+          <a:prstGeom prst="rect">
+            <a:avLst/>
+          </a:prstGeom>
+          <a:noFill/>
+        </p:spPr>
+        <p:txBody>
+          <a:bodyPr wrap="square">
+            <a:spAutoFit/>
+          </a:bodyPr>
+          <a:lstStyle/>
+          <a:p>
+            <a:pPr algn="l"/>
+            <a:r>
+              <a:rPr sz="1100" b="1">
+                <a:solidFill>
+                  <a:srgbClr val="7FB3D5"/>
+                </a:solidFill>
+                <a:latin typeface="Consolas"/>
+              </a:rPr>
+              <a:t>SummaryPanel.jsx</a:t>
+            </a:r>
+          </a:p>
+        </p:txBody>
+      </p:sp>
+      <p:sp>
+        <p:nvSpPr>
+          <p:cNvPr id="19" name="TextBox 18"/>
+          <p:cNvSpPr txBox="1"/>
+          <p:nvPr/>
+        </p:nvSpPr>
+        <p:spPr>
+          <a:xfrm>
+            <a:off x="3611879" y="2816351"/>
+            <a:ext cx="7772400" cy="329184"/>
+          </a:xfrm>
+          <a:prstGeom prst="rect">
+            <a:avLst/>
+          </a:prstGeom>
+          <a:noFill/>
+        </p:spPr>
+        <p:txBody>
+          <a:bodyPr wrap="square">
+            <a:spAutoFit/>
+          </a:bodyPr>
+          <a:lstStyle/>
+          <a:p>
+            <a:pPr algn="l"/>
+            <a:r>
+              <a:rPr sz="1050" b="0">
+                <a:solidFill>
+                  <a:srgbClr val="C9D4DF"/>
+                </a:solidFill>
+                <a:latin typeface="맑은 고딕"/>
+              </a:rPr>
+              <a:t>비전문가용 상태 배너·진단 카드·문장형 주요 이벤트 요약</a:t>
+            </a:r>
+          </a:p>
+        </p:txBody>
+      </p:sp>
+      <p:sp>
+        <p:nvSpPr>
+          <p:cNvPr id="20" name="TextBox 19"/>
+          <p:cNvSpPr txBox="1"/>
+          <p:nvPr/>
+        </p:nvSpPr>
+        <p:spPr>
+          <a:xfrm>
+            <a:off x="457200" y="3145535"/>
+            <a:ext cx="3017520" cy="329184"/>
+          </a:xfrm>
+          <a:prstGeom prst="rect">
+            <a:avLst/>
+          </a:prstGeom>
+          <a:noFill/>
+        </p:spPr>
+        <p:txBody>
+          <a:bodyPr wrap="square">
+            <a:spAutoFit/>
+          </a:bodyPr>
+          <a:lstStyle/>
+          <a:p>
+            <a:pPr algn="l"/>
+            <a:r>
+              <a:rPr sz="1100" b="1">
+                <a:solidFill>
+                  <a:srgbClr val="7FB3D5"/>
+                </a:solidFill>
+                <a:latin typeface="Consolas"/>
+              </a:rPr>
+              <a:t>EventTable / StatCards</a:t>
+            </a:r>
+          </a:p>
+        </p:txBody>
+      </p:sp>
+      <p:sp>
+        <p:nvSpPr>
+          <p:cNvPr id="21" name="TextBox 20"/>
+          <p:cNvSpPr txBox="1"/>
+          <p:nvPr/>
+        </p:nvSpPr>
+        <p:spPr>
+          <a:xfrm>
+            <a:off x="3611879" y="3145535"/>
+            <a:ext cx="7772400" cy="329184"/>
+          </a:xfrm>
+          <a:prstGeom prst="rect">
+            <a:avLst/>
+          </a:prstGeom>
+          <a:noFill/>
+        </p:spPr>
+        <p:txBody>
+          <a:bodyPr wrap="square">
+            <a:spAutoFit/>
+          </a:bodyPr>
+          <a:lstStyle/>
+          <a:p>
+            <a:pPr algn="l"/>
+            <a:r>
+              <a:rPr sz="1050" b="0">
+                <a:solidFill>
+                  <a:srgbClr val="C9D4DF"/>
+                </a:solidFill>
+                <a:latin typeface="맑은 고딕"/>
+              </a:rPr>
+              <a:t>이벤트 원장 테이블, 파일 교체(교체 전/후 경로) 강조 표시</a:t>
+            </a:r>
+          </a:p>
+        </p:txBody>
+      </p:sp>
+      <p:sp>
+        <p:nvSpPr>
+          <p:cNvPr id="22" name="TextBox 21"/>
+          <p:cNvSpPr txBox="1"/>
+          <p:nvPr/>
+        </p:nvSpPr>
+        <p:spPr>
+          <a:xfrm>
+            <a:off x="457200" y="3474719"/>
+            <a:ext cx="3017520" cy="329184"/>
+          </a:xfrm>
+          <a:prstGeom prst="rect">
+            <a:avLst/>
+          </a:prstGeom>
+          <a:noFill/>
+        </p:spPr>
+        <p:txBody>
+          <a:bodyPr wrap="square">
+            <a:spAutoFit/>
+          </a:bodyPr>
+          <a:lstStyle/>
+          <a:p>
+            <a:pPr algn="l"/>
+            <a:r>
+              <a:rPr sz="1100" b="1">
+                <a:solidFill>
+                  <a:srgbClr val="7FB3D5"/>
+                </a:solidFill>
+                <a:latin typeface="Consolas"/>
+              </a:rPr>
+              <a:t>admin/ActorGate.jsx</a:t>
+            </a:r>
+          </a:p>
+        </p:txBody>
+      </p:sp>
+      <p:sp>
+        <p:nvSpPr>
+          <p:cNvPr id="23" name="TextBox 22"/>
+          <p:cNvSpPr txBox="1"/>
+          <p:nvPr/>
+        </p:nvSpPr>
+        <p:spPr>
+          <a:xfrm>
+            <a:off x="3611879" y="3474719"/>
+            <a:ext cx="7772400" cy="329184"/>
+          </a:xfrm>
+          <a:prstGeom prst="rect">
+            <a:avLst/>
+          </a:prstGeom>
+          <a:noFill/>
+        </p:spPr>
+        <p:txBody>
+          <a:bodyPr wrap="square">
+            <a:spAutoFit/>
+          </a:bodyPr>
+          <a:lstStyle/>
+          <a:p>
+            <a:pPr algn="l"/>
+            <a:r>
+              <a:rPr sz="1050" b="0">
+                <a:solidFill>
+                  <a:srgbClr val="C9D4DF"/>
+                </a:solidFill>
+                <a:latin typeface="맑은 고딕"/>
+              </a:rPr>
+              <a:t>작업자 이름 식별 — 관리자 변경 이력의 "누가"를 채우는 입력 게이트</a:t>
+            </a:r>
+          </a:p>
+        </p:txBody>
+      </p:sp>
+      <p:sp>
+        <p:nvSpPr>
+          <p:cNvPr id="24" name="TextBox 23"/>
+          <p:cNvSpPr txBox="1"/>
+          <p:nvPr/>
+        </p:nvSpPr>
+        <p:spPr>
+          <a:xfrm>
+            <a:off x="457200" y="3803903"/>
+            <a:ext cx="3017520" cy="329184"/>
+          </a:xfrm>
+          <a:prstGeom prst="rect">
+            <a:avLst/>
+          </a:prstGeom>
+          <a:noFill/>
+        </p:spPr>
+        <p:txBody>
+          <a:bodyPr wrap="square">
+            <a:spAutoFit/>
+          </a:bodyPr>
+          <a:lstStyle/>
+          <a:p>
+            <a:pPr algn="l"/>
+            <a:r>
+              <a:rPr sz="1100" b="1">
+                <a:solidFill>
+                  <a:srgbClr val="7FB3D5"/>
+                </a:solidFill>
+                <a:latin typeface="Consolas"/>
+              </a:rPr>
+              <a:t>admin/WatchPathManager</a:t>
+            </a:r>
+          </a:p>
+        </p:txBody>
+      </p:sp>
+      <p:sp>
+        <p:nvSpPr>
+          <p:cNvPr id="25" name="TextBox 24"/>
+          <p:cNvSpPr txBox="1"/>
+          <p:nvPr/>
+        </p:nvSpPr>
+        <p:spPr>
+          <a:xfrm>
+            <a:off x="3611879" y="3803903"/>
+            <a:ext cx="7772400" cy="329184"/>
+          </a:xfrm>
+          <a:prstGeom prst="rect">
+            <a:avLst/>
+          </a:prstGeom>
+          <a:noFill/>
+        </p:spPr>
+        <p:txBody>
+          <a:bodyPr wrap="square">
+            <a:spAutoFit/>
+          </a:bodyPr>
+          <a:lstStyle/>
+          <a:p>
+            <a:pPr algn="l"/>
+            <a:r>
+              <a:rPr sz="1050" b="0">
+                <a:solidFill>
+                  <a:srgbClr val="C9D4DF"/>
+                </a:solidFill>
+                <a:latin typeface="맑은 고딕"/>
+              </a:rPr>
+              <a:t>감시 경로 등록/삭제/on-off + 경로 오류(⚠) 배지</a:t>
+            </a:r>
+          </a:p>
+        </p:txBody>
+      </p:sp>
+      <p:sp>
+        <p:nvSpPr>
+          <p:cNvPr id="26" name="TextBox 25"/>
+          <p:cNvSpPr txBox="1"/>
+          <p:nvPr/>
+        </p:nvSpPr>
+        <p:spPr>
+          <a:xfrm>
+            <a:off x="457200" y="4133087"/>
+            <a:ext cx="3017520" cy="329184"/>
+          </a:xfrm>
+          <a:prstGeom prst="rect">
+            <a:avLst/>
+          </a:prstGeom>
+          <a:noFill/>
+        </p:spPr>
+        <p:txBody>
+          <a:bodyPr wrap="square">
+            <a:spAutoFit/>
+          </a:bodyPr>
+          <a:lstStyle/>
+          <a:p>
+            <a:pPr algn="l"/>
+            <a:r>
+              <a:rPr sz="1100" b="1">
+                <a:solidFill>
+                  <a:srgbClr val="7FB3D5"/>
+                </a:solidFill>
+                <a:latin typeface="Consolas"/>
+              </a:rPr>
+              <a:t>admin/QuarantineManager</a:t>
+            </a:r>
+          </a:p>
+        </p:txBody>
+      </p:sp>
+      <p:sp>
+        <p:nvSpPr>
+          <p:cNvPr id="27" name="TextBox 26"/>
+          <p:cNvSpPr txBox="1"/>
+          <p:nvPr/>
+        </p:nvSpPr>
+        <p:spPr>
+          <a:xfrm>
+            <a:off x="3611879" y="4133087"/>
+            <a:ext cx="7772400" cy="329184"/>
+          </a:xfrm>
+          <a:prstGeom prst="rect">
+            <a:avLst/>
+          </a:prstGeom>
+          <a:noFill/>
+        </p:spPr>
+        <p:txBody>
+          <a:bodyPr wrap="square">
+            <a:spAutoFit/>
+          </a:bodyPr>
+          <a:lstStyle/>
+          <a:p>
+            <a:pPr algn="l"/>
+            <a:r>
+              <a:rPr sz="1050" b="0">
+                <a:solidFill>
+                  <a:srgbClr val="C9D4DF"/>
+                </a:solidFill>
+                <a:latin typeface="맑은 고딕"/>
+              </a:rPr>
+              <a:t>격리 파일 목록 확인, 복원/영구삭제</a:t>
+            </a:r>
+          </a:p>
+        </p:txBody>
+      </p:sp>
+      <p:sp>
+        <p:nvSpPr>
+          <p:cNvPr id="28" name="TextBox 27"/>
+          <p:cNvSpPr txBox="1"/>
+          <p:nvPr/>
+        </p:nvSpPr>
+        <p:spPr>
+          <a:xfrm>
+            <a:off x="457200" y="4462272"/>
+            <a:ext cx="3017520" cy="329184"/>
+          </a:xfrm>
+          <a:prstGeom prst="rect">
+            <a:avLst/>
+          </a:prstGeom>
+          <a:noFill/>
+        </p:spPr>
+        <p:txBody>
+          <a:bodyPr wrap="square">
+            <a:spAutoFit/>
+          </a:bodyPr>
+          <a:lstStyle/>
+          <a:p>
+            <a:pPr algn="l"/>
+            <a:r>
+              <a:rPr sz="1100" b="1">
+                <a:solidFill>
+                  <a:srgbClr val="7FB3D5"/>
+                </a:solidFill>
+                <a:latin typeface="Consolas"/>
+              </a:rPr>
+              <a:t>admin/SetupChecklist</a:t>
+            </a:r>
+          </a:p>
+        </p:txBody>
+      </p:sp>
+      <p:sp>
+        <p:nvSpPr>
+          <p:cNvPr id="29" name="TextBox 28"/>
+          <p:cNvSpPr txBox="1"/>
+          <p:nvPr/>
+        </p:nvSpPr>
+        <p:spPr>
+          <a:xfrm>
+            <a:off x="3611879" y="4462272"/>
+            <a:ext cx="7772400" cy="329184"/>
+          </a:xfrm>
+          <a:prstGeom prst="rect">
+            <a:avLst/>
+          </a:prstGeom>
+          <a:noFill/>
+        </p:spPr>
+        <p:txBody>
+          <a:bodyPr wrap="square">
+            <a:spAutoFit/>
+          </a:bodyPr>
+          <a:lstStyle/>
+          <a:p>
+            <a:pPr algn="l"/>
+            <a:r>
+              <a:rPr sz="1050" b="0">
+                <a:solidFill>
+                  <a:srgbClr val="C9D4DF"/>
+                </a:solidFill>
+                <a:latin typeface="맑은 고딕"/>
+              </a:rPr>
+              <a:t>설치 체크리스트 UI + 진행률 바</a:t>
+            </a:r>
+          </a:p>
+        </p:txBody>
+      </p:sp>
+      <p:sp>
+        <p:nvSpPr>
+          <p:cNvPr id="30" name="TextBox 29"/>
+          <p:cNvSpPr txBox="1"/>
+          <p:nvPr/>
+        </p:nvSpPr>
+        <p:spPr>
+          <a:xfrm>
+            <a:off x="457200" y="4791456"/>
+            <a:ext cx="3017520" cy="329184"/>
+          </a:xfrm>
+          <a:prstGeom prst="rect">
+            <a:avLst/>
+          </a:prstGeom>
+          <a:noFill/>
+        </p:spPr>
+        <p:txBody>
+          <a:bodyPr wrap="square">
+            <a:spAutoFit/>
+          </a:bodyPr>
+          <a:lstStyle/>
+          <a:p>
+            <a:pPr algn="l"/>
+            <a:r>
+              <a:rPr sz="1100" b="1">
+                <a:solidFill>
+                  <a:srgbClr val="7FB3D5"/>
+                </a:solidFill>
+                <a:latin typeface="Consolas"/>
+              </a:rPr>
+              <a:t>admin/ConfigBackup</a:t>
+            </a:r>
+          </a:p>
+        </p:txBody>
+      </p:sp>
+      <p:sp>
+        <p:nvSpPr>
+          <p:cNvPr id="31" name="TextBox 30"/>
+          <p:cNvSpPr txBox="1"/>
+          <p:nvPr/>
+        </p:nvSpPr>
+        <p:spPr>
+          <a:xfrm>
+            <a:off x="3611879" y="4791456"/>
+            <a:ext cx="7772400" cy="329184"/>
+          </a:xfrm>
+          <a:prstGeom prst="rect">
+            <a:avLst/>
+          </a:prstGeom>
+          <a:noFill/>
+        </p:spPr>
+        <p:txBody>
+          <a:bodyPr wrap="square">
+            <a:spAutoFit/>
+          </a:bodyPr>
+          <a:lstStyle/>
+          <a:p>
+            <a:pPr algn="l"/>
+            <a:r>
+              <a:rPr sz="1050" b="0">
+                <a:solidFill>
+                  <a:srgbClr val="C9D4DF"/>
+                </a:solidFill>
+                <a:latin typeface="맑은 고딕"/>
+              </a:rPr>
+              <a:t>설정 내보내기/가져오기(JSON) — 다중 서버 표준 배포</a:t>
+            </a:r>
+          </a:p>
+        </p:txBody>
+      </p:sp>
+      <p:sp>
+        <p:nvSpPr>
+          <p:cNvPr id="32" name="TextBox 31"/>
+          <p:cNvSpPr txBox="1"/>
+          <p:nvPr/>
+        </p:nvSpPr>
+        <p:spPr>
+          <a:xfrm>
+            <a:off x="457200" y="5120640"/>
+            <a:ext cx="3017520" cy="329184"/>
+          </a:xfrm>
+          <a:prstGeom prst="rect">
+            <a:avLst/>
+          </a:prstGeom>
+          <a:noFill/>
+        </p:spPr>
+        <p:txBody>
+          <a:bodyPr wrap="square">
+            <a:spAutoFit/>
+          </a:bodyPr>
+          <a:lstStyle/>
+          <a:p>
+            <a:pPr algn="l"/>
+            <a:r>
+              <a:rPr sz="1100" b="1">
+                <a:solidFill>
+                  <a:srgbClr val="7FB3D5"/>
+                </a:solidFill>
+                <a:latin typeface="Consolas"/>
+              </a:rPr>
+              <a:t>admin/AdminAuditLog</a:t>
+            </a:r>
+          </a:p>
+        </p:txBody>
+      </p:sp>
+      <p:sp>
+        <p:nvSpPr>
+          <p:cNvPr id="33" name="TextBox 32"/>
+          <p:cNvSpPr txBox="1"/>
+          <p:nvPr/>
+        </p:nvSpPr>
+        <p:spPr>
+          <a:xfrm>
+            <a:off x="3611879" y="5120640"/>
+            <a:ext cx="7772400" cy="329184"/>
+          </a:xfrm>
+          <a:prstGeom prst="rect">
+            <a:avLst/>
+          </a:prstGeom>
+          <a:noFill/>
+        </p:spPr>
+        <p:txBody>
+          <a:bodyPr wrap="square">
+            <a:spAutoFit/>
+          </a:bodyPr>
+          <a:lstStyle/>
+          <a:p>
+            <a:pPr algn="l"/>
+            <a:r>
+              <a:rPr sz="1050" b="0">
+                <a:solidFill>
+                  <a:srgbClr val="C9D4DF"/>
+                </a:solidFill>
+                <a:latin typeface="맑은 고딕"/>
+              </a:rPr>
+              <a:t>관리자 변경 이력 타임라인 UI</a:t>
+            </a:r>
+          </a:p>
+        </p:txBody>
+      </p:sp>
+      <p:sp>
+        <p:nvSpPr>
+          <p:cNvPr id="34" name="Rounded Rectangle 33"/>
+          <p:cNvSpPr/>
+          <p:nvPr/>
+        </p:nvSpPr>
+        <p:spPr>
+          <a:xfrm>
+            <a:off x="457200" y="5577840"/>
+            <a:ext cx="10789920" cy="685800"/>
+          </a:xfrm>
+          <a:prstGeom prst="roundRect">
+            <a:avLst/>
+          </a:prstGeom>
+          <a:solidFill>
+            <a:srgbClr val="1A2430"/>
+          </a:solidFill>
+          <a:ln>
+            <a:noFill/>
+          </a:ln>
+          <a:effectLst/>
+        </p:spPr>
+        <p:style>
+          <a:lnRef idx="1">
+            <a:schemeClr val="accent1"/>
+          </a:lnRef>
+          <a:fillRef idx="3">
+            <a:schemeClr val="accent1"/>
+          </a:fillRef>
+          <a:effectRef idx="2">
+            <a:schemeClr val="accent1"/>
+          </a:effectRef>
+          <a:fontRef idx="minor">
+            <a:schemeClr val="lt1"/>
+          </a:fontRef>
+        </p:style>
+        <p:txBody>
+          <a:bodyPr rtlCol="0" anchor="ctr"/>
+          <a:lstStyle/>
+          <a:p>
+            <a:pPr algn="ctr"/>
+          </a:p>
+        </p:txBody>
+      </p:sp>
+      <p:sp>
+        <p:nvSpPr>
+          <p:cNvPr id="35" name="TextBox 34"/>
+          <p:cNvSpPr txBox="1"/>
+          <p:nvPr/>
+        </p:nvSpPr>
+        <p:spPr>
+          <a:xfrm>
+            <a:off x="685800" y="5696712"/>
+            <a:ext cx="2011680" cy="274320"/>
+          </a:xfrm>
+          <a:prstGeom prst="rect">
+            <a:avLst/>
+          </a:prstGeom>
+          <a:noFill/>
+        </p:spPr>
+        <p:txBody>
+          <a:bodyPr wrap="square">
+            <a:spAutoFit/>
+          </a:bodyPr>
+          <a:lstStyle/>
+          <a:p>
+            <a:pPr algn="l"/>
+            <a:r>
+              <a:rPr sz="1050" b="1">
+                <a:solidFill>
+                  <a:srgbClr val="7FB3D5"/>
+                </a:solidFill>
+                <a:latin typeface="Consolas"/>
+              </a:rPr>
+              <a:t>IMPACT</a:t>
+            </a:r>
+          </a:p>
+        </p:txBody>
+      </p:sp>
+      <p:sp>
+        <p:nvSpPr>
+          <p:cNvPr id="36" name="TextBox 35"/>
+          <p:cNvSpPr txBox="1"/>
+          <p:nvPr/>
+        </p:nvSpPr>
+        <p:spPr>
+          <a:xfrm>
+            <a:off x="685800" y="5989320"/>
+            <a:ext cx="10332720" cy="182879"/>
+          </a:xfrm>
+          <a:prstGeom prst="rect">
+            <a:avLst/>
+          </a:prstGeom>
+          <a:noFill/>
+        </p:spPr>
+        <p:txBody>
+          <a:bodyPr wrap="square">
+            <a:spAutoFit/>
+          </a:bodyPr>
+          <a:lstStyle/>
+          <a:p>
+            <a:pPr algn="l"/>
+            <a:r>
+              <a:rPr sz="1300" b="0">
+                <a:solidFill>
+                  <a:srgbClr val="C9D4DF"/>
+                </a:solidFill>
+                <a:latin typeface="맑은 고딕"/>
+              </a:rPr>
+              <a:t>관리자 탭이 '보기 전용 대시보드'에서 경로·격리·설정·체크리스트·감사이력을 다루는 하나의 운영 콘솔로 진화했습니다.</a:t>
+            </a:r>
+          </a:p>
+        </p:txBody>
+      </p:sp>
+    </p:spTree>
+  </p:cSld>
+  <p:clrMapOvr>
+    <a:masterClrMapping/>
+  </p:clrMapOvr>
+</p:sld>
+</file>
+
+<file path=ppt/slides/slide23.xml><?xml version="1.0" encoding="utf-8"?>
+<p:sld xmlns:a="http://schemas.openxmlformats.org/drawingml/2006/main" xmlns:p="http://schemas.openxmlformats.org/presentationml/2006/main" xmlns:r="http://schemas.openxmlformats.org/officeDocument/2006/relationships">
+  <p:cSld>
+    <p:bg>
+      <p:bgPr>
+        <a:solidFill>
+          <a:srgbClr val="0E141B"/>
+        </a:solidFill>
+        <a:effectLst/>
+      </p:bgPr>
+    </p:bg>
+    <p:spTree>
+      <p:nvGrpSpPr>
+        <p:cNvPr id="1" name=""/>
+        <p:cNvGrpSpPr/>
+        <p:nvPr/>
+      </p:nvGrpSpPr>
+      <p:grpSpPr/>
+      <p:sp>
+        <p:nvSpPr>
+          <p:cNvPr id="2" name="Oval 1"/>
+          <p:cNvSpPr/>
+          <p:nvPr/>
+        </p:nvSpPr>
+        <p:spPr>
+          <a:xfrm>
+            <a:off x="457200" y="310896"/>
+            <a:ext cx="82296" cy="82296"/>
+          </a:xfrm>
+          <a:prstGeom prst="ellipse">
+            <a:avLst/>
+          </a:prstGeom>
+          <a:solidFill>
+            <a:srgbClr val="3DB88B"/>
+          </a:solidFill>
+          <a:ln>
+            <a:noFill/>
+          </a:ln>
+          <a:effectLst/>
+        </p:spPr>
+        <p:style>
+          <a:lnRef idx="1">
+            <a:schemeClr val="accent1"/>
+          </a:lnRef>
+          <a:fillRef idx="3">
+            <a:schemeClr val="accent1"/>
+          </a:fillRef>
+          <a:effectRef idx="2">
+            <a:schemeClr val="accent1"/>
+          </a:effectRef>
+          <a:fontRef idx="minor">
+            <a:schemeClr val="lt1"/>
+          </a:fontRef>
+        </p:style>
+        <p:txBody>
+          <a:bodyPr rtlCol="0" anchor="ctr"/>
+          <a:lstStyle/>
+          <a:p>
+            <a:pPr algn="ctr"/>
+          </a:p>
+        </p:txBody>
+      </p:sp>
+      <p:sp>
+        <p:nvSpPr>
+          <p:cNvPr id="3" name="TextBox 2"/>
+          <p:cNvSpPr txBox="1"/>
+          <p:nvPr/>
+        </p:nvSpPr>
+        <p:spPr>
+          <a:xfrm>
+            <a:off x="621792" y="256032"/>
+            <a:ext cx="2377440" cy="274320"/>
+          </a:xfrm>
+          <a:prstGeom prst="rect">
+            <a:avLst/>
+          </a:prstGeom>
+          <a:noFill/>
+        </p:spPr>
+        <p:txBody>
+          <a:bodyPr wrap="square">
+            <a:spAutoFit/>
+          </a:bodyPr>
+          <a:lstStyle/>
+          <a:p>
+            <a:pPr algn="l"/>
+            <a:r>
+              <a:rPr sz="1300" b="1">
+                <a:solidFill>
+                  <a:srgbClr val="F4F8FB"/>
+                </a:solidFill>
+                <a:latin typeface="Consolas"/>
+              </a:rPr>
+              <a:t>LHAMS</a:t>
+            </a:r>
+          </a:p>
+        </p:txBody>
+      </p:sp>
+      <p:sp>
+        <p:nvSpPr>
+          <p:cNvPr id="4" name="TextBox 3"/>
+          <p:cNvSpPr txBox="1"/>
+          <p:nvPr/>
+        </p:nvSpPr>
+        <p:spPr>
+          <a:xfrm>
+            <a:off x="1417320" y="265176"/>
+            <a:ext cx="3657600" cy="256032"/>
+          </a:xfrm>
+          <a:prstGeom prst="rect">
+            <a:avLst/>
+          </a:prstGeom>
+          <a:noFill/>
+        </p:spPr>
+        <p:txBody>
+          <a:bodyPr wrap="square">
+            <a:spAutoFit/>
+          </a:bodyPr>
+          <a:lstStyle/>
+          <a:p>
+            <a:pPr algn="l"/>
+            <a:r>
+              <a:rPr sz="1050" b="0">
+                <a:solidFill>
+                  <a:srgbClr val="6E7E8E"/>
+                </a:solidFill>
+                <a:latin typeface="맑은 고딕"/>
+              </a:rPr>
+              <a:t>보안 감사 시스템 세미나</a:t>
+            </a:r>
+          </a:p>
+        </p:txBody>
+      </p:sp>
+      <p:sp>
+        <p:nvSpPr>
+          <p:cNvPr id="5" name="TextBox 4"/>
+          <p:cNvSpPr txBox="1"/>
+          <p:nvPr/>
+        </p:nvSpPr>
+        <p:spPr>
+          <a:xfrm>
+            <a:off x="8778240" y="265176"/>
+            <a:ext cx="2926080" cy="256032"/>
+          </a:xfrm>
+          <a:prstGeom prst="rect">
+            <a:avLst/>
+          </a:prstGeom>
+          <a:noFill/>
+        </p:spPr>
+        <p:txBody>
+          <a:bodyPr wrap="square">
+            <a:spAutoFit/>
+          </a:bodyPr>
+          <a:lstStyle/>
+          <a:p>
+            <a:pPr algn="r"/>
+            <a:r>
+              <a:rPr sz="1000" b="0">
+                <a:solidFill>
+                  <a:srgbClr val="6E7E8E"/>
+                </a:solidFill>
+                <a:latin typeface="Consolas"/>
+              </a:rPr>
+              <a:t>12 — 거버넌스</a:t>
+            </a:r>
+          </a:p>
+        </p:txBody>
+      </p:sp>
+      <p:cxnSp>
+        <p:nvCxnSpPr>
+          <p:cNvPr id="6" name="Connector 5"/>
+          <p:cNvCxnSpPr/>
+          <p:nvPr/>
+        </p:nvCxnSpPr>
+        <p:spPr>
+          <a:xfrm>
+            <a:off x="457200" y="658368"/>
+            <a:ext cx="11274552" cy="0"/>
+          </a:xfrm>
+          <a:prstGeom prst="line">
+            <a:avLst/>
+          </a:prstGeom>
+          <a:ln w="9525">
+            <a:solidFill>
+              <a:srgbClr val="24303C"/>
+            </a:solidFill>
+          </a:ln>
+        </p:spPr>
+        <p:style>
+          <a:lnRef idx="2">
+            <a:schemeClr val="accent1"/>
+          </a:lnRef>
+          <a:fillRef idx="0">
+            <a:schemeClr val="accent1"/>
+          </a:fillRef>
+          <a:effectRef idx="1">
+            <a:schemeClr val="accent1"/>
+          </a:effectRef>
+          <a:fontRef idx="minor">
+            <a:schemeClr val="tx1"/>
+          </a:fontRef>
+        </p:style>
+      </p:cxnSp>
+      <p:sp>
+        <p:nvSpPr>
+          <p:cNvPr id="7" name="TextBox 6"/>
+          <p:cNvSpPr txBox="1"/>
+          <p:nvPr/>
+        </p:nvSpPr>
+        <p:spPr>
+          <a:xfrm>
+            <a:off x="10881360" y="6473952"/>
+            <a:ext cx="822960" cy="274320"/>
+          </a:xfrm>
+          <a:prstGeom prst="rect">
+            <a:avLst/>
+          </a:prstGeom>
+          <a:noFill/>
+        </p:spPr>
+        <p:txBody>
+          <a:bodyPr wrap="square">
+            <a:spAutoFit/>
+          </a:bodyPr>
+          <a:lstStyle/>
+          <a:p>
+            <a:pPr algn="r"/>
+            <a:r>
+              <a:rPr sz="1000" b="0">
+                <a:solidFill>
+                  <a:srgbClr val="6E7E8E"/>
+                </a:solidFill>
+                <a:latin typeface="Consolas"/>
+              </a:rPr>
+              <a:t>20 / 24</a:t>
+            </a:r>
+          </a:p>
+        </p:txBody>
+      </p:sp>
+      <p:sp>
+        <p:nvSpPr>
+          <p:cNvPr id="8" name="Rectangle 7"/>
+          <p:cNvSpPr/>
+          <p:nvPr/>
+        </p:nvSpPr>
+        <p:spPr>
+          <a:xfrm>
+            <a:off x="457200" y="923544"/>
+            <a:ext cx="201168" cy="17373"/>
+          </a:xfrm>
+          <a:prstGeom prst="rect">
+            <a:avLst/>
+          </a:prstGeom>
+          <a:solidFill>
+            <a:srgbClr val="7FB3D5"/>
+          </a:solidFill>
+          <a:ln>
+            <a:noFill/>
+          </a:ln>
+          <a:effectLst/>
+        </p:spPr>
+        <p:style>
+          <a:lnRef idx="1">
+            <a:schemeClr val="accent1"/>
+          </a:lnRef>
+          <a:fillRef idx="3">
+            <a:schemeClr val="accent1"/>
+          </a:fillRef>
+          <a:effectRef idx="2">
+            <a:schemeClr val="accent1"/>
+          </a:effectRef>
+          <a:fontRef idx="minor">
+            <a:schemeClr val="lt1"/>
+          </a:fontRef>
+        </p:style>
+        <p:txBody>
+          <a:bodyPr rtlCol="0" anchor="ctr"/>
+          <a:lstStyle/>
+          <a:p>
+            <a:pPr algn="ctr"/>
+          </a:p>
+        </p:txBody>
+      </p:sp>
+      <p:sp>
+        <p:nvSpPr>
+          <p:cNvPr id="9" name="TextBox 8"/>
+          <p:cNvSpPr txBox="1"/>
+          <p:nvPr/>
+        </p:nvSpPr>
+        <p:spPr>
+          <a:xfrm>
+            <a:off x="731520" y="841248"/>
+            <a:ext cx="7315200" cy="274320"/>
+          </a:xfrm>
+          <a:prstGeom prst="rect">
+            <a:avLst/>
+          </a:prstGeom>
+          <a:noFill/>
+        </p:spPr>
+        <p:txBody>
+          <a:bodyPr wrap="square">
+            <a:spAutoFit/>
+          </a:bodyPr>
+          <a:lstStyle/>
+          <a:p>
+            <a:pPr algn="l"/>
+            <a:r>
+              <a:rPr sz="1150" b="1">
+                <a:solidFill>
+                  <a:srgbClr val="7FB3D5"/>
+                </a:solidFill>
+                <a:latin typeface="Consolas"/>
+              </a:rPr>
+              <a:t>12 · GOVERNANCE</a:t>
+            </a:r>
+          </a:p>
+        </p:txBody>
+      </p:sp>
+      <p:sp>
+        <p:nvSpPr>
+          <p:cNvPr id="10" name="TextBox 9"/>
+          <p:cNvSpPr txBox="1"/>
+          <p:nvPr/>
+        </p:nvSpPr>
+        <p:spPr>
+          <a:xfrm>
+            <a:off x="457200" y="1170432"/>
+            <a:ext cx="11247120" cy="822960"/>
+          </a:xfrm>
+          <a:prstGeom prst="rect">
+            <a:avLst/>
+          </a:prstGeom>
+          <a:noFill/>
+        </p:spPr>
+        <p:txBody>
+          <a:bodyPr wrap="square">
+            <a:spAutoFit/>
+          </a:bodyPr>
+          <a:lstStyle/>
+          <a:p>
+            <a:pPr algn="l"/>
+            <a:r>
+              <a:rPr sz="2800" b="1">
+                <a:solidFill>
+                  <a:srgbClr val="F4F8FB"/>
+                </a:solidFill>
+                <a:latin typeface="맑은 고딕"/>
+              </a:rPr>
+              <a:t>관리 기능 고도화 — 누가, 무엇을 바꿨는가</a:t>
+            </a:r>
+          </a:p>
+        </p:txBody>
+      </p:sp>
+      <p:sp>
+        <p:nvSpPr>
+          <p:cNvPr id="11" name="TextBox 10"/>
+          <p:cNvSpPr txBox="1"/>
+          <p:nvPr/>
+        </p:nvSpPr>
+        <p:spPr>
+          <a:xfrm>
+            <a:off x="457200" y="1828800"/>
+            <a:ext cx="10789920" cy="3108960"/>
+          </a:xfrm>
+          <a:prstGeom prst="rect">
+            <a:avLst/>
+          </a:prstGeom>
+          <a:noFill/>
+        </p:spPr>
+        <p:txBody>
+          <a:bodyPr wrap="square">
+            <a:spAutoFit/>
+          </a:bodyPr>
+          <a:lstStyle/>
+          <a:p>
+            <a:pPr algn="l"/>
+            <a:r>
+              <a:rPr sz="1300" b="0">
+                <a:solidFill>
+                  <a:srgbClr val="C9D4DF"/>
+                </a:solidFill>
+                <a:latin typeface="맑은 고딕"/>
+              </a:rPr>
+              <a:t>—  작업자 식별 — 이름/사번 1회 입력, 이후 모든 변경에 자동 첨부</a:t>
+            </a:r>
+          </a:p>
+          <a:p>
+            <a:pPr algn="l"/>
+            <a:r>
+              <a:rPr sz="1300" b="0">
+                <a:solidFill>
+                  <a:srgbClr val="C9D4DF"/>
+                </a:solidFill>
+                <a:latin typeface="맑은 고딕"/>
+              </a:rPr>
+              <a:t>—  관리자 변경 이력 — 경로·격리·설정·체크리스트 변경을 "누가·언제·무엇을" 시간순 기록</a:t>
+            </a:r>
+          </a:p>
+          <a:p>
+            <a:pPr algn="l"/>
+            <a:r>
+              <a:rPr sz="1300" b="0">
+                <a:solidFill>
+                  <a:srgbClr val="C9D4DF"/>
+                </a:solidFill>
+                <a:latin typeface="맑은 고딕"/>
+              </a:rPr>
+              <a:t>—  설치 체크리스트 — 신규 구축 8단계를 완료자·완료 시각과 함께 추적</a:t>
+            </a:r>
+          </a:p>
+          <a:p>
+            <a:pPr algn="l"/>
+            <a:r>
+              <a:rPr sz="1300" b="0">
+                <a:solidFill>
+                  <a:srgbClr val="C9D4DF"/>
+                </a:solidFill>
+                <a:latin typeface="맑은 고딕"/>
+              </a:rPr>
+              <a:t>—  설정 자동 백업 — 변경마다 스냅샷 보관(최근 20개), 실수 복구 가능</a:t>
+            </a:r>
+          </a:p>
+        </p:txBody>
+      </p:sp>
+      <p:sp>
+        <p:nvSpPr>
+          <p:cNvPr id="12" name="Rounded Rectangle 11"/>
+          <p:cNvSpPr/>
+          <p:nvPr/>
+        </p:nvSpPr>
+        <p:spPr>
+          <a:xfrm>
+            <a:off x="457200" y="5074920"/>
+            <a:ext cx="10789920" cy="1051560"/>
+          </a:xfrm>
+          <a:prstGeom prst="roundRect">
+            <a:avLst/>
+          </a:prstGeom>
+          <a:solidFill>
+            <a:srgbClr val="1A2430"/>
+          </a:solidFill>
+          <a:ln>
+            <a:noFill/>
+          </a:ln>
+          <a:effectLst/>
+        </p:spPr>
+        <p:style>
+          <a:lnRef idx="1">
+            <a:schemeClr val="accent1"/>
+          </a:lnRef>
+          <a:fillRef idx="3">
+            <a:schemeClr val="accent1"/>
+          </a:fillRef>
+          <a:effectRef idx="2">
+            <a:schemeClr val="accent1"/>
+          </a:effectRef>
+          <a:fontRef idx="minor">
+            <a:schemeClr val="lt1"/>
+          </a:fontRef>
+        </p:style>
+        <p:txBody>
+          <a:bodyPr rtlCol="0" anchor="ctr"/>
+          <a:lstStyle/>
+          <a:p>
+            <a:pPr algn="ctr"/>
+          </a:p>
+        </p:txBody>
+      </p:sp>
+      <p:sp>
+        <p:nvSpPr>
+          <p:cNvPr id="13" name="TextBox 12"/>
+          <p:cNvSpPr txBox="1"/>
+          <p:nvPr/>
+        </p:nvSpPr>
+        <p:spPr>
+          <a:xfrm>
+            <a:off x="685800" y="5193792"/>
+            <a:ext cx="2011680" cy="274320"/>
+          </a:xfrm>
+          <a:prstGeom prst="rect">
+            <a:avLst/>
+          </a:prstGeom>
+          <a:noFill/>
+        </p:spPr>
+        <p:txBody>
+          <a:bodyPr wrap="square">
+            <a:spAutoFit/>
+          </a:bodyPr>
+          <a:lstStyle/>
+          <a:p>
+            <a:pPr algn="l"/>
+            <a:r>
+              <a:rPr sz="1050" b="1">
+                <a:solidFill>
+                  <a:srgbClr val="7FB3D5"/>
+                </a:solidFill>
+                <a:latin typeface="Consolas"/>
+              </a:rPr>
+              <a:t>IMPACT</a:t>
+            </a:r>
+          </a:p>
+        </p:txBody>
+      </p:sp>
+      <p:sp>
+        <p:nvSpPr>
+          <p:cNvPr id="14" name="TextBox 13"/>
+          <p:cNvSpPr txBox="1"/>
+          <p:nvPr/>
+        </p:nvSpPr>
+        <p:spPr>
+          <a:xfrm>
+            <a:off x="685800" y="5486400"/>
+            <a:ext cx="10332720" cy="548639"/>
+          </a:xfrm>
+          <a:prstGeom prst="rect">
+            <a:avLst/>
+          </a:prstGeom>
+          <a:noFill/>
+        </p:spPr>
+        <p:txBody>
+          <a:bodyPr wrap="square">
+            <a:spAutoFit/>
+          </a:bodyPr>
+          <a:lstStyle/>
+          <a:p>
+            <a:pPr algn="l"/>
+            <a:r>
+              <a:rPr sz="1300" b="0">
+                <a:solidFill>
+                  <a:srgbClr val="C9D4DF"/>
+                </a:solidFill>
+                <a:latin typeface="맑은 고딕"/>
+              </a:rPr>
+              <a:t>'누가 바꿨는지 알 수 없다'는 감사의 공백을 관리자 조작까지 포함해 없앴습니다. 여러 개발자가 나눠 구축해도 진행 상황이 한눈에 보입니다.</a:t>
+            </a:r>
+          </a:p>
+        </p:txBody>
+      </p:sp>
+    </p:spTree>
+  </p:cSld>
+  <p:clrMapOvr>
+    <a:masterClrMapping/>
+  </p:clrMapOvr>
+</p:sld>
+</file>
+
+<file path=ppt/slides/slide24.xml><?xml version="1.0" encoding="utf-8"?>
+<p:sld xmlns:a="http://schemas.openxmlformats.org/drawingml/2006/main" xmlns:p="http://schemas.openxmlformats.org/presentationml/2006/main" xmlns:r="http://schemas.openxmlformats.org/officeDocument/2006/relationships">
+  <p:cSld>
+    <p:bg>
+      <p:bgPr>
+        <a:solidFill>
+          <a:srgbClr val="0E141B"/>
+        </a:solidFill>
+        <a:effectLst/>
+      </p:bgPr>
+    </p:bg>
+    <p:spTree>
+      <p:nvGrpSpPr>
+        <p:cNvPr id="1" name=""/>
+        <p:cNvGrpSpPr/>
+        <p:nvPr/>
+      </p:nvGrpSpPr>
+      <p:grpSpPr/>
+      <p:sp>
+        <p:nvSpPr>
+          <p:cNvPr id="2" name="Oval 1"/>
+          <p:cNvSpPr/>
+          <p:nvPr/>
+        </p:nvSpPr>
+        <p:spPr>
+          <a:xfrm>
+            <a:off x="457200" y="310896"/>
+            <a:ext cx="82296" cy="82296"/>
+          </a:xfrm>
+          <a:prstGeom prst="ellipse">
+            <a:avLst/>
+          </a:prstGeom>
+          <a:solidFill>
+            <a:srgbClr val="3DB88B"/>
+          </a:solidFill>
+          <a:ln>
+            <a:noFill/>
+          </a:ln>
+          <a:effectLst/>
+        </p:spPr>
+        <p:style>
+          <a:lnRef idx="1">
+            <a:schemeClr val="accent1"/>
+          </a:lnRef>
+          <a:fillRef idx="3">
+            <a:schemeClr val="accent1"/>
+          </a:fillRef>
+          <a:effectRef idx="2">
+            <a:schemeClr val="accent1"/>
+          </a:effectRef>
+          <a:fontRef idx="minor">
+            <a:schemeClr val="lt1"/>
+          </a:fontRef>
+        </p:style>
+        <p:txBody>
+          <a:bodyPr rtlCol="0" anchor="ctr"/>
+          <a:lstStyle/>
+          <a:p>
+            <a:pPr algn="ctr"/>
+          </a:p>
+        </p:txBody>
+      </p:sp>
+      <p:sp>
+        <p:nvSpPr>
+          <p:cNvPr id="3" name="TextBox 2"/>
+          <p:cNvSpPr txBox="1"/>
+          <p:nvPr/>
+        </p:nvSpPr>
+        <p:spPr>
+          <a:xfrm>
+            <a:off x="621792" y="256032"/>
+            <a:ext cx="2377440" cy="274320"/>
+          </a:xfrm>
+          <a:prstGeom prst="rect">
+            <a:avLst/>
+          </a:prstGeom>
+          <a:noFill/>
+        </p:spPr>
+        <p:txBody>
+          <a:bodyPr wrap="square">
+            <a:spAutoFit/>
+          </a:bodyPr>
+          <a:lstStyle/>
+          <a:p>
+            <a:pPr algn="l"/>
+            <a:r>
+              <a:rPr sz="1300" b="1">
+                <a:solidFill>
+                  <a:srgbClr val="F4F8FB"/>
+                </a:solidFill>
+                <a:latin typeface="Consolas"/>
+              </a:rPr>
+              <a:t>LHAMS</a:t>
+            </a:r>
+          </a:p>
+        </p:txBody>
+      </p:sp>
+      <p:sp>
+        <p:nvSpPr>
+          <p:cNvPr id="4" name="TextBox 3"/>
+          <p:cNvSpPr txBox="1"/>
+          <p:nvPr/>
+        </p:nvSpPr>
+        <p:spPr>
+          <a:xfrm>
+            <a:off x="1417320" y="265176"/>
+            <a:ext cx="3657600" cy="256032"/>
+          </a:xfrm>
+          <a:prstGeom prst="rect">
+            <a:avLst/>
+          </a:prstGeom>
+          <a:noFill/>
+        </p:spPr>
+        <p:txBody>
+          <a:bodyPr wrap="square">
+            <a:spAutoFit/>
+          </a:bodyPr>
+          <a:lstStyle/>
+          <a:p>
+            <a:pPr algn="l"/>
+            <a:r>
+              <a:rPr sz="1050" b="0">
+                <a:solidFill>
+                  <a:srgbClr val="6E7E8E"/>
+                </a:solidFill>
+                <a:latin typeface="맑은 고딕"/>
+              </a:rPr>
+              <a:t>보안 감사 시스템 세미나</a:t>
+            </a:r>
+          </a:p>
+        </p:txBody>
+      </p:sp>
+      <p:sp>
+        <p:nvSpPr>
+          <p:cNvPr id="5" name="TextBox 4"/>
+          <p:cNvSpPr txBox="1"/>
+          <p:nvPr/>
+        </p:nvSpPr>
+        <p:spPr>
+          <a:xfrm>
+            <a:off x="8778240" y="265176"/>
+            <a:ext cx="2926080" cy="256032"/>
+          </a:xfrm>
+          <a:prstGeom prst="rect">
+            <a:avLst/>
+          </a:prstGeom>
+          <a:noFill/>
+        </p:spPr>
+        <p:txBody>
+          <a:bodyPr wrap="square">
+            <a:spAutoFit/>
+          </a:bodyPr>
+          <a:lstStyle/>
+          <a:p>
+            <a:pPr algn="r"/>
+            <a:r>
+              <a:rPr sz="1000" b="0">
+                <a:solidFill>
+                  <a:srgbClr val="6E7E8E"/>
+                </a:solidFill>
+                <a:latin typeface="Consolas"/>
+              </a:rPr>
+              <a:t>13 — 요약·SI표준</a:t>
+            </a:r>
+          </a:p>
+        </p:txBody>
+      </p:sp>
+      <p:cxnSp>
+        <p:nvCxnSpPr>
+          <p:cNvPr id="6" name="Connector 5"/>
+          <p:cNvCxnSpPr/>
+          <p:nvPr/>
+        </p:nvCxnSpPr>
+        <p:spPr>
+          <a:xfrm>
+            <a:off x="457200" y="658368"/>
+            <a:ext cx="11274552" cy="0"/>
+          </a:xfrm>
+          <a:prstGeom prst="line">
+            <a:avLst/>
+          </a:prstGeom>
+          <a:ln w="9525">
+            <a:solidFill>
+              <a:srgbClr val="24303C"/>
+            </a:solidFill>
+          </a:ln>
+        </p:spPr>
+        <p:style>
+          <a:lnRef idx="2">
+            <a:schemeClr val="accent1"/>
+          </a:lnRef>
+          <a:fillRef idx="0">
+            <a:schemeClr val="accent1"/>
+          </a:fillRef>
+          <a:effectRef idx="1">
+            <a:schemeClr val="accent1"/>
+          </a:effectRef>
+          <a:fontRef idx="minor">
+            <a:schemeClr val="tx1"/>
+          </a:fontRef>
+        </p:style>
+      </p:cxnSp>
+      <p:sp>
+        <p:nvSpPr>
+          <p:cNvPr id="7" name="TextBox 6"/>
+          <p:cNvSpPr txBox="1"/>
+          <p:nvPr/>
+        </p:nvSpPr>
+        <p:spPr>
+          <a:xfrm>
+            <a:off x="10881360" y="6473952"/>
+            <a:ext cx="822960" cy="274320"/>
+          </a:xfrm>
+          <a:prstGeom prst="rect">
+            <a:avLst/>
+          </a:prstGeom>
+          <a:noFill/>
+        </p:spPr>
+        <p:txBody>
+          <a:bodyPr wrap="square">
+            <a:spAutoFit/>
+          </a:bodyPr>
+          <a:lstStyle/>
+          <a:p>
+            <a:pPr algn="r"/>
+            <a:r>
+              <a:rPr sz="1000" b="0">
+                <a:solidFill>
+                  <a:srgbClr val="6E7E8E"/>
+                </a:solidFill>
+                <a:latin typeface="Consolas"/>
+              </a:rPr>
+              <a:t>21 / 24</a:t>
+            </a:r>
+          </a:p>
+        </p:txBody>
+      </p:sp>
+      <p:sp>
+        <p:nvSpPr>
+          <p:cNvPr id="8" name="Rectangle 7"/>
+          <p:cNvSpPr/>
+          <p:nvPr/>
+        </p:nvSpPr>
+        <p:spPr>
+          <a:xfrm>
+            <a:off x="457200" y="923544"/>
+            <a:ext cx="201168" cy="17373"/>
+          </a:xfrm>
+          <a:prstGeom prst="rect">
+            <a:avLst/>
+          </a:prstGeom>
+          <a:solidFill>
+            <a:srgbClr val="7FB3D5"/>
+          </a:solidFill>
+          <a:ln>
+            <a:noFill/>
+          </a:ln>
+          <a:effectLst/>
+        </p:spPr>
+        <p:style>
+          <a:lnRef idx="1">
+            <a:schemeClr val="accent1"/>
+          </a:lnRef>
+          <a:fillRef idx="3">
+            <a:schemeClr val="accent1"/>
+          </a:fillRef>
+          <a:effectRef idx="2">
+            <a:schemeClr val="accent1"/>
+          </a:effectRef>
+          <a:fontRef idx="minor">
+            <a:schemeClr val="lt1"/>
+          </a:fontRef>
+        </p:style>
+        <p:txBody>
+          <a:bodyPr rtlCol="0" anchor="ctr"/>
+          <a:lstStyle/>
+          <a:p>
+            <a:pPr algn="ctr"/>
+          </a:p>
+        </p:txBody>
+      </p:sp>
+      <p:sp>
+        <p:nvSpPr>
+          <p:cNvPr id="9" name="TextBox 8"/>
+          <p:cNvSpPr txBox="1"/>
+          <p:nvPr/>
+        </p:nvSpPr>
+        <p:spPr>
+          <a:xfrm>
+            <a:off x="731520" y="841248"/>
+            <a:ext cx="7315200" cy="274320"/>
+          </a:xfrm>
+          <a:prstGeom prst="rect">
+            <a:avLst/>
+          </a:prstGeom>
+          <a:noFill/>
+        </p:spPr>
+        <p:txBody>
+          <a:bodyPr wrap="square">
+            <a:spAutoFit/>
+          </a:bodyPr>
+          <a:lstStyle/>
+          <a:p>
+            <a:pPr algn="l"/>
+            <a:r>
+              <a:rPr sz="1150" b="1">
+                <a:solidFill>
+                  <a:srgbClr val="7FB3D5"/>
+                </a:solidFill>
+                <a:latin typeface="Consolas"/>
+              </a:rPr>
+              <a:t>13 · SUMMARY &amp; SI-READY</a:t>
+            </a:r>
+          </a:p>
+        </p:txBody>
+      </p:sp>
+      <p:sp>
+        <p:nvSpPr>
+          <p:cNvPr id="10" name="TextBox 9"/>
+          <p:cNvSpPr txBox="1"/>
+          <p:nvPr/>
+        </p:nvSpPr>
+        <p:spPr>
+          <a:xfrm>
+            <a:off x="457200" y="1170432"/>
+            <a:ext cx="11247120" cy="822960"/>
+          </a:xfrm>
+          <a:prstGeom prst="rect">
+            <a:avLst/>
+          </a:prstGeom>
+          <a:noFill/>
+        </p:spPr>
+        <p:txBody>
+          <a:bodyPr wrap="square">
+            <a:spAutoFit/>
+          </a:bodyPr>
+          <a:lstStyle/>
+          <a:p>
+            <a:pPr algn="l"/>
+            <a:r>
+              <a:rPr sz="2800" b="1">
+                <a:solidFill>
+                  <a:srgbClr val="F4F8FB"/>
+                </a:solidFill>
+                <a:latin typeface="맑은 고딕"/>
+              </a:rPr>
+              <a:t>비전문가용 요약 &amp; SI/온프레미스 표준화</a:t>
+            </a:r>
+          </a:p>
+        </p:txBody>
+      </p:sp>
+      <p:sp>
+        <p:nvSpPr>
+          <p:cNvPr id="11" name="TextBox 10"/>
+          <p:cNvSpPr txBox="1"/>
+          <p:nvPr/>
+        </p:nvSpPr>
+        <p:spPr>
+          <a:xfrm>
+            <a:off x="457200" y="1828800"/>
+            <a:ext cx="10789920" cy="3108960"/>
+          </a:xfrm>
+          <a:prstGeom prst="rect">
+            <a:avLst/>
+          </a:prstGeom>
+          <a:noFill/>
+        </p:spPr>
+        <p:txBody>
+          <a:bodyPr wrap="square">
+            <a:spAutoFit/>
+          </a:bodyPr>
+          <a:lstStyle/>
+          <a:p>
+            <a:pPr algn="l"/>
+            <a:r>
+              <a:rPr sz="1300" b="0">
+                <a:solidFill>
+                  <a:srgbClr val="C9D4DF"/>
+                </a:solidFill>
+                <a:latin typeface="맑은 고딕"/>
+              </a:rPr>
+              <a:t>—  요약 탭 — 상태 배너("정상 보호"/"확인 필요"/"응답 없음") + 문장형 이벤트로 즉시 파악</a:t>
+            </a:r>
+          </a:p>
+          <a:p>
+            <a:pPr algn="l"/>
+            <a:r>
+              <a:rPr sz="1300" b="0">
+                <a:solidFill>
+                  <a:srgbClr val="C9D4DF"/>
+                </a:solidFill>
+                <a:latin typeface="맑은 고딕"/>
+              </a:rPr>
+              <a:t>—  LHAMS_HOME 한 줄 설정 — 경로 7개 대신 홈 경로 하나로 구축 시간 단축</a:t>
+            </a:r>
+          </a:p>
+          <a:p>
+            <a:pPr algn="l"/>
+            <a:r>
+              <a:rPr sz="1300" b="0">
+                <a:solidFill>
+                  <a:srgbClr val="C9D4DF"/>
+                </a:solidFill>
+                <a:latin typeface="맑은 고딕"/>
+              </a:rPr>
+              <a:t>—  사이트 식별(SITE_NAME/ID) + /api/health — 다중 서버 가동상태 한눈에 확인</a:t>
+            </a:r>
+          </a:p>
+          <a:p>
+            <a:pPr algn="l"/>
+            <a:r>
+              <a:rPr sz="1300" b="0">
+                <a:solidFill>
+                  <a:srgbClr val="C9D4DF"/>
+                </a:solidFill>
+                <a:latin typeface="맑은 고딕"/>
+              </a:rPr>
+              <a:t>—  폐쇄망 대응 — 런타임 외부 호출 없음, 빌드 산출물만 반입하는 오프라인 배포</a:t>
+            </a:r>
+          </a:p>
+        </p:txBody>
+      </p:sp>
+      <p:sp>
+        <p:nvSpPr>
+          <p:cNvPr id="12" name="Rounded Rectangle 11"/>
+          <p:cNvSpPr/>
+          <p:nvPr/>
+        </p:nvSpPr>
+        <p:spPr>
+          <a:xfrm>
+            <a:off x="457200" y="5074920"/>
+            <a:ext cx="10789920" cy="1051560"/>
+          </a:xfrm>
+          <a:prstGeom prst="roundRect">
+            <a:avLst/>
+          </a:prstGeom>
+          <a:solidFill>
+            <a:srgbClr val="1A2430"/>
+          </a:solidFill>
+          <a:ln>
+            <a:noFill/>
+          </a:ln>
+          <a:effectLst/>
+        </p:spPr>
+        <p:style>
+          <a:lnRef idx="1">
+            <a:schemeClr val="accent1"/>
+          </a:lnRef>
+          <a:fillRef idx="3">
+            <a:schemeClr val="accent1"/>
+          </a:fillRef>
+          <a:effectRef idx="2">
+            <a:schemeClr val="accent1"/>
+          </a:effectRef>
+          <a:fontRef idx="minor">
+            <a:schemeClr val="lt1"/>
+          </a:fontRef>
+        </p:style>
+        <p:txBody>
+          <a:bodyPr rtlCol="0" anchor="ctr"/>
+          <a:lstStyle/>
+          <a:p>
+            <a:pPr algn="ctr"/>
+          </a:p>
+        </p:txBody>
+      </p:sp>
+      <p:sp>
+        <p:nvSpPr>
+          <p:cNvPr id="13" name="TextBox 12"/>
+          <p:cNvSpPr txBox="1"/>
+          <p:nvPr/>
+        </p:nvSpPr>
+        <p:spPr>
+          <a:xfrm>
+            <a:off x="685800" y="5193792"/>
+            <a:ext cx="2011680" cy="274320"/>
+          </a:xfrm>
+          <a:prstGeom prst="rect">
+            <a:avLst/>
+          </a:prstGeom>
+          <a:noFill/>
+        </p:spPr>
+        <p:txBody>
+          <a:bodyPr wrap="square">
+            <a:spAutoFit/>
+          </a:bodyPr>
+          <a:lstStyle/>
+          <a:p>
+            <a:pPr algn="l"/>
+            <a:r>
+              <a:rPr sz="1050" b="1">
+                <a:solidFill>
+                  <a:srgbClr val="7FB3D5"/>
+                </a:solidFill>
+                <a:latin typeface="Consolas"/>
+              </a:rPr>
+              <a:t>IMPACT</a:t>
+            </a:r>
+          </a:p>
+        </p:txBody>
+      </p:sp>
+      <p:sp>
+        <p:nvSpPr>
+          <p:cNvPr id="14" name="TextBox 13"/>
+          <p:cNvSpPr txBox="1"/>
+          <p:nvPr/>
+        </p:nvSpPr>
+        <p:spPr>
+          <a:xfrm>
+            <a:off x="685800" y="5486400"/>
+            <a:ext cx="10332720" cy="548639"/>
+          </a:xfrm>
+          <a:prstGeom prst="rect">
+            <a:avLst/>
+          </a:prstGeom>
+          <a:noFill/>
+        </p:spPr>
+        <p:txBody>
+          <a:bodyPr wrap="square">
+            <a:spAutoFit/>
+          </a:bodyPr>
+          <a:lstStyle/>
+          <a:p>
+            <a:pPr algn="l"/>
+            <a:r>
+              <a:rPr sz="1300" b="0">
+                <a:solidFill>
+                  <a:srgbClr val="C9D4DF"/>
+                </a:solidFill>
+                <a:latin typeface="맑은 고딕"/>
+              </a:rPr>
+              <a:t>세미나용 PoC에서 SI·온프레미스 다중 고객사에 표준화된 방식으로 구축·운영할 수 있는 제품 형태로 발전했습니다.</a:t>
             </a:r>
           </a:p>
         </p:txBody>
@@ -12696,13 +16118,13 @@
               </a:lnSpc>
             </a:pPr>
             <a:r>
-              <a:rPr sz="1000" b="0" i="0">
+              <a:rPr sz="1000" b="0">
                 <a:solidFill>
                   <a:srgbClr val="6E7E8E"/>
                 </a:solidFill>
                 <a:latin typeface="Consolas"/>
               </a:rPr>
-              <a:t>03 / 20</a:t>
+              <a:t>03 / 24</a:t>
             </a:r>
           </a:p>
         </p:txBody>
@@ -13527,13 +16949,13 @@
               </a:lnSpc>
             </a:pPr>
             <a:r>
-              <a:rPr sz="1000" b="0" i="0">
+              <a:rPr sz="1000" b="0">
                 <a:solidFill>
                   <a:srgbClr val="6E7E8E"/>
                 </a:solidFill>
                 <a:latin typeface="Consolas"/>
               </a:rPr>
-              <a:t>04 / 20</a:t>
+              <a:t>04 / 24</a:t>
             </a:r>
           </a:p>
         </p:txBody>
@@ -14642,13 +18064,13 @@
               </a:lnSpc>
             </a:pPr>
             <a:r>
-              <a:rPr sz="1000" b="0" i="0">
+              <a:rPr sz="1000" b="0">
                 <a:solidFill>
                   <a:srgbClr val="6E7E8E"/>
                 </a:solidFill>
                 <a:latin typeface="Consolas"/>
               </a:rPr>
-              <a:t>05 / 20</a:t>
+              <a:t>05 / 24</a:t>
             </a:r>
           </a:p>
         </p:txBody>
@@ -15297,13 +18719,13 @@
               </a:lnSpc>
             </a:pPr>
             <a:r>
-              <a:rPr sz="1000" b="0" i="0">
+              <a:rPr sz="1000" b="0">
                 <a:solidFill>
                   <a:srgbClr val="6E7E8E"/>
                 </a:solidFill>
                 <a:latin typeface="Consolas"/>
               </a:rPr>
-              <a:t>06 / 20</a:t>
+              <a:t>06 / 24</a:t>
             </a:r>
           </a:p>
         </p:txBody>
@@ -16362,13 +19784,13 @@
               </a:lnSpc>
             </a:pPr>
             <a:r>
-              <a:rPr sz="1000" b="0" i="0">
+              <a:rPr sz="1000" b="0">
                 <a:solidFill>
                   <a:srgbClr val="6E7E8E"/>
                 </a:solidFill>
                 <a:latin typeface="Consolas"/>
               </a:rPr>
-              <a:t>07 / 20</a:t>
+              <a:t>07 / 24</a:t>
             </a:r>
           </a:p>
         </p:txBody>
@@ -16536,14 +19958,6 @@
             </a:r>
           </a:p>
           <a:p>
-            <a:pPr>
-              <a:lnSpc>
-                <a:spcPct val="135000"/>
-              </a:lnSpc>
-              <a:spcAft>
-                <a:spcPts val="1000"/>
-              </a:spcAft>
-            </a:pPr>
             <a:r>
               <a:rPr sz="1400">
                 <a:solidFill>
@@ -16551,18 +19965,10 @@
                 </a:solidFill>
                 <a:latin typeface="맑은 고딕"/>
               </a:rPr>
-              <a:t>—  TimedRotatingFileHandler로 자정마다 로그 자동 로테이션</a:t>
-            </a:r>
-          </a:p>
-          <a:p>
-            <a:pPr>
-              <a:lnSpc>
-                <a:spcPct val="135000"/>
-              </a:lnSpc>
-              <a:spcAft>
-                <a:spcPts val="1000"/>
-              </a:spcAft>
-            </a:pPr>
+              <a:t>—  TimedRotatingFileHandler로 자정마다 로그 자동 로테이션 + Flask 관리 API 백그라운드 기동</a:t>
+            </a:r>
+          </a:p>
+          <a:p>
             <a:r>
               <a:rPr sz="1400">
                 <a:solidFill>
@@ -16570,7 +19976,7 @@
                 </a:solidFill>
                 <a:latin typeface="맑은 고딕"/>
               </a:rPr>
-              <a:t>—  화이트리스트/블랙리스트 정규식 기반 필터링, 이상 징후 시 Slack Webhook 호출</a:t>
+              <a:t>—  경로/무시규칙/체크리스트/감사이력/헬스체크(/api/health)를 재시작 없이 운영, 변경 시 자동 백업</a:t>
             </a:r>
           </a:p>
         </p:txBody>
@@ -17135,13 +20541,13 @@
               </a:lnSpc>
             </a:pPr>
             <a:r>
-              <a:rPr sz="1000" b="0" i="0">
+              <a:rPr sz="1000" b="0">
                 <a:solidFill>
                   <a:srgbClr val="6E7E8E"/>
                 </a:solidFill>
                 <a:latin typeface="Consolas"/>
               </a:rPr>
-              <a:t>08 / 20</a:t>
+              <a:t>08 / 24</a:t>
             </a:r>
           </a:p>
         </p:txBody>
@@ -17635,7 +21041,7 @@
                 </a:solidFill>
                 <a:latin typeface="맑은 고딕"/>
               </a:rPr>
-              <a:t>—  JSON 로그를 3초 주기로 폴링, 새로고침 없이 위험 인자를 하이라이트하는 관제 UI.</a:t>
+              <a:t>—  JSON 로그 3초 폴링 + 관리 API 5초 헬스체크 · 요약/대시보드/관리자 3-tab 구조로 확장</a:t>
             </a:r>
           </a:p>
         </p:txBody>
@@ -18076,13 +21482,13 @@
               </a:lnSpc>
             </a:pPr>
             <a:r>
-              <a:rPr sz="1000" b="0" i="0">
+              <a:rPr sz="1000" b="0">
                 <a:solidFill>
                   <a:srgbClr val="6E7E8E"/>
                 </a:solidFill>
                 <a:latin typeface="Consolas"/>
               </a:rPr>
-              <a:t>09 / 20</a:t>
+              <a:t>09 / 24</a:t>
             </a:r>
           </a:p>
         </p:txBody>
